--- a/results/Figure 3.pptx
+++ b/results/Figure 3.pptx
@@ -4,6 +4,9 @@
   <p:sldMasterIdLst>
     <p:sldMasterId id="2147483648" r:id="rId1"/>
   </p:sldMasterIdLst>
+  <p:notesMasterIdLst>
+    <p:notesMasterId r:id="rId6"/>
+  </p:notesMasterIdLst>
   <p:sldIdLst>
     <p:sldId id="257" r:id="rId2"/>
     <p:sldId id="259" r:id="rId3"/>
@@ -115,6 +118,929 @@
 </p:presentation>
 </file>
 
+<file path=ppt/revisionInfo.xml><?xml version="1.0" encoding="utf-8"?>
+<p1510:revInfo xmlns:a="http://schemas.openxmlformats.org/drawingml/2006/main" xmlns:r="http://schemas.openxmlformats.org/officeDocument/2006/relationships" xmlns:p1510="http://schemas.microsoft.com/office/powerpoint/2015/10/main">
+  <p1510:revLst>
+    <p1510:client id="{CFA21663-D1FE-4C66-A3A4-13BC7C407EB5}" v="4" dt="2026-06-03T16:18:07.641"/>
+  </p1510:revLst>
+</p1510:revInfo>
+</file>
+
+<file path=ppt/changesInfos/changesInfo1.xml><?xml version="1.0" encoding="utf-8"?>
+<pc:chgInfo xmlns:a="http://schemas.openxmlformats.org/drawingml/2006/main" xmlns:r="http://schemas.openxmlformats.org/officeDocument/2006/relationships" xmlns:ac="http://schemas.microsoft.com/office/drawing/2013/main/command" xmlns:pc="http://schemas.microsoft.com/office/powerpoint/2013/main/command">
+  <pc:docChgLst>
+    <pc:chgData name="Shevlin, Blair" userId="84ba045b-a58b-4124-82eb-e2fd3a9b1d68" providerId="ADAL" clId="{30024126-5384-4DA1-8B4F-6CA6F8B40A7D}"/>
+    <pc:docChg chg="undo redo custSel modSld">
+      <pc:chgData name="Shevlin, Blair" userId="84ba045b-a58b-4124-82eb-e2fd3a9b1d68" providerId="ADAL" clId="{30024126-5384-4DA1-8B4F-6CA6F8B40A7D}" dt="2026-06-03T16:50:05.995" v="190" actId="22"/>
+      <pc:docMkLst>
+        <pc:docMk/>
+      </pc:docMkLst>
+      <pc:sldChg chg="addSp delSp modSp mod">
+        <pc:chgData name="Shevlin, Blair" userId="84ba045b-a58b-4124-82eb-e2fd3a9b1d68" providerId="ADAL" clId="{30024126-5384-4DA1-8B4F-6CA6F8B40A7D}" dt="2026-06-03T16:22:11.801" v="113" actId="478"/>
+        <pc:sldMkLst>
+          <pc:docMk/>
+          <pc:sldMk cId="2947515437" sldId="257"/>
+        </pc:sldMkLst>
+        <pc:picChg chg="add mod">
+          <ac:chgData name="Shevlin, Blair" userId="84ba045b-a58b-4124-82eb-e2fd3a9b1d68" providerId="ADAL" clId="{30024126-5384-4DA1-8B4F-6CA6F8B40A7D}" dt="2026-06-03T13:31:47.162" v="2" actId="1076"/>
+          <ac:picMkLst>
+            <pc:docMk/>
+            <pc:sldMk cId="2947515437" sldId="257"/>
+            <ac:picMk id="3" creationId="{E7403EA9-C0D0-587D-D7F1-00A6CCA22D8D}"/>
+          </ac:picMkLst>
+        </pc:picChg>
+        <pc:picChg chg="add del mod">
+          <ac:chgData name="Shevlin, Blair" userId="84ba045b-a58b-4124-82eb-e2fd3a9b1d68" providerId="ADAL" clId="{30024126-5384-4DA1-8B4F-6CA6F8B40A7D}" dt="2026-06-03T16:22:11.801" v="113" actId="478"/>
+          <ac:picMkLst>
+            <pc:docMk/>
+            <pc:sldMk cId="2947515437" sldId="257"/>
+            <ac:picMk id="4" creationId="{2426AE97-51EC-3D86-5DEE-79745A7711B9}"/>
+          </ac:picMkLst>
+        </pc:picChg>
+        <pc:picChg chg="del">
+          <ac:chgData name="Shevlin, Blair" userId="84ba045b-a58b-4124-82eb-e2fd3a9b1d68" providerId="ADAL" clId="{30024126-5384-4DA1-8B4F-6CA6F8B40A7D}" dt="2026-06-03T13:31:40.602" v="1" actId="478"/>
+          <ac:picMkLst>
+            <pc:docMk/>
+            <pc:sldMk cId="2947515437" sldId="257"/>
+            <ac:picMk id="5" creationId="{69422AD6-F27B-5B5B-8473-AC420686B8A7}"/>
+          </ac:picMkLst>
+        </pc:picChg>
+        <pc:picChg chg="del">
+          <ac:chgData name="Shevlin, Blair" userId="84ba045b-a58b-4124-82eb-e2fd3a9b1d68" providerId="ADAL" clId="{30024126-5384-4DA1-8B4F-6CA6F8B40A7D}" dt="2026-06-03T16:17:34.624" v="7" actId="478"/>
+          <ac:picMkLst>
+            <pc:docMk/>
+            <pc:sldMk cId="2947515437" sldId="257"/>
+            <ac:picMk id="10" creationId="{72A6AD27-D11F-8AF4-5811-BC8CDAFA5420}"/>
+          </ac:picMkLst>
+        </pc:picChg>
+      </pc:sldChg>
+      <pc:sldChg chg="addSp delSp modSp mod">
+        <pc:chgData name="Shevlin, Blair" userId="84ba045b-a58b-4124-82eb-e2fd3a9b1d68" providerId="ADAL" clId="{30024126-5384-4DA1-8B4F-6CA6F8B40A7D}" dt="2026-06-03T16:50:05.995" v="190" actId="22"/>
+        <pc:sldMkLst>
+          <pc:docMk/>
+          <pc:sldMk cId="3203209101" sldId="258"/>
+        </pc:sldMkLst>
+        <pc:spChg chg="del">
+          <ac:chgData name="Shevlin, Blair" userId="84ba045b-a58b-4124-82eb-e2fd3a9b1d68" providerId="ADAL" clId="{30024126-5384-4DA1-8B4F-6CA6F8B40A7D}" dt="2026-06-03T16:50:03.510" v="189" actId="478"/>
+          <ac:spMkLst>
+            <pc:docMk/>
+            <pc:sldMk cId="3203209101" sldId="258"/>
+            <ac:spMk id="3" creationId="{73E6BF4E-30B3-2537-B5A1-C2D73F490253}"/>
+          </ac:spMkLst>
+        </pc:spChg>
+        <pc:spChg chg="del">
+          <ac:chgData name="Shevlin, Blair" userId="84ba045b-a58b-4124-82eb-e2fd3a9b1d68" providerId="ADAL" clId="{30024126-5384-4DA1-8B4F-6CA6F8B40A7D}" dt="2026-06-03T16:50:03.510" v="189" actId="478"/>
+          <ac:spMkLst>
+            <pc:docMk/>
+            <pc:sldMk cId="3203209101" sldId="258"/>
+            <ac:spMk id="4" creationId="{81936BA9-FD79-4ADD-C0EF-8E216B034F69}"/>
+          </ac:spMkLst>
+        </pc:spChg>
+        <pc:spChg chg="del">
+          <ac:chgData name="Shevlin, Blair" userId="84ba045b-a58b-4124-82eb-e2fd3a9b1d68" providerId="ADAL" clId="{30024126-5384-4DA1-8B4F-6CA6F8B40A7D}" dt="2026-06-03T16:50:03.510" v="189" actId="478"/>
+          <ac:spMkLst>
+            <pc:docMk/>
+            <pc:sldMk cId="3203209101" sldId="258"/>
+            <ac:spMk id="6" creationId="{E8AF8BF9-7232-5697-1E53-D761E3FF3B7D}"/>
+          </ac:spMkLst>
+        </pc:spChg>
+        <pc:spChg chg="del">
+          <ac:chgData name="Shevlin, Blair" userId="84ba045b-a58b-4124-82eb-e2fd3a9b1d68" providerId="ADAL" clId="{30024126-5384-4DA1-8B4F-6CA6F8B40A7D}" dt="2026-06-03T16:50:03.510" v="189" actId="478"/>
+          <ac:spMkLst>
+            <pc:docMk/>
+            <pc:sldMk cId="3203209101" sldId="258"/>
+            <ac:spMk id="20" creationId="{07C82C3B-CD0A-4A41-1F88-DD48D85D5B03}"/>
+          </ac:spMkLst>
+        </pc:spChg>
+        <pc:spChg chg="del">
+          <ac:chgData name="Shevlin, Blair" userId="84ba045b-a58b-4124-82eb-e2fd3a9b1d68" providerId="ADAL" clId="{30024126-5384-4DA1-8B4F-6CA6F8B40A7D}" dt="2026-06-03T16:50:03.510" v="189" actId="478"/>
+          <ac:spMkLst>
+            <pc:docMk/>
+            <pc:sldMk cId="3203209101" sldId="258"/>
+            <ac:spMk id="32" creationId="{8DD6E756-0CC3-77D2-363B-7A6CD265044F}"/>
+          </ac:spMkLst>
+        </pc:spChg>
+        <pc:spChg chg="del">
+          <ac:chgData name="Shevlin, Blair" userId="84ba045b-a58b-4124-82eb-e2fd3a9b1d68" providerId="ADAL" clId="{30024126-5384-4DA1-8B4F-6CA6F8B40A7D}" dt="2026-06-03T16:50:03.510" v="189" actId="478"/>
+          <ac:spMkLst>
+            <pc:docMk/>
+            <pc:sldMk cId="3203209101" sldId="258"/>
+            <ac:spMk id="33" creationId="{25EC7661-BB91-FC48-6C29-7058B406BDEA}"/>
+          </ac:spMkLst>
+        </pc:spChg>
+        <pc:spChg chg="del">
+          <ac:chgData name="Shevlin, Blair" userId="84ba045b-a58b-4124-82eb-e2fd3a9b1d68" providerId="ADAL" clId="{30024126-5384-4DA1-8B4F-6CA6F8B40A7D}" dt="2026-06-03T16:50:03.510" v="189" actId="478"/>
+          <ac:spMkLst>
+            <pc:docMk/>
+            <pc:sldMk cId="3203209101" sldId="258"/>
+            <ac:spMk id="35" creationId="{C54FB3AD-808D-0E0A-CB51-2E2B7CE88CAC}"/>
+          </ac:spMkLst>
+        </pc:spChg>
+        <pc:spChg chg="del">
+          <ac:chgData name="Shevlin, Blair" userId="84ba045b-a58b-4124-82eb-e2fd3a9b1d68" providerId="ADAL" clId="{30024126-5384-4DA1-8B4F-6CA6F8B40A7D}" dt="2026-06-03T16:50:03.510" v="189" actId="478"/>
+          <ac:spMkLst>
+            <pc:docMk/>
+            <pc:sldMk cId="3203209101" sldId="258"/>
+            <ac:spMk id="37" creationId="{C2E6296A-71E5-4D4D-F610-FD3FD29E1AE6}"/>
+          </ac:spMkLst>
+        </pc:spChg>
+        <pc:spChg chg="del">
+          <ac:chgData name="Shevlin, Blair" userId="84ba045b-a58b-4124-82eb-e2fd3a9b1d68" providerId="ADAL" clId="{30024126-5384-4DA1-8B4F-6CA6F8B40A7D}" dt="2026-06-03T16:50:03.510" v="189" actId="478"/>
+          <ac:spMkLst>
+            <pc:docMk/>
+            <pc:sldMk cId="3203209101" sldId="258"/>
+            <ac:spMk id="38" creationId="{3BB06FA2-B71E-A28C-CDBC-AC5CD1E0E635}"/>
+          </ac:spMkLst>
+        </pc:spChg>
+        <pc:spChg chg="del">
+          <ac:chgData name="Shevlin, Blair" userId="84ba045b-a58b-4124-82eb-e2fd3a9b1d68" providerId="ADAL" clId="{30024126-5384-4DA1-8B4F-6CA6F8B40A7D}" dt="2026-06-03T16:50:03.510" v="189" actId="478"/>
+          <ac:spMkLst>
+            <pc:docMk/>
+            <pc:sldMk cId="3203209101" sldId="258"/>
+            <ac:spMk id="41" creationId="{AEE1A74B-EB37-6893-FCA1-EA1EA60362B0}"/>
+          </ac:spMkLst>
+        </pc:spChg>
+        <pc:picChg chg="mod">
+          <ac:chgData name="Shevlin, Blair" userId="84ba045b-a58b-4124-82eb-e2fd3a9b1d68" providerId="ADAL" clId="{30024126-5384-4DA1-8B4F-6CA6F8B40A7D}" dt="2026-06-03T16:21:07.627" v="111" actId="1076"/>
+          <ac:picMkLst>
+            <pc:docMk/>
+            <pc:sldMk cId="3203209101" sldId="258"/>
+            <ac:picMk id="2" creationId="{F367F566-5FCD-9EFA-01F3-3C2BB11609AB}"/>
+          </ac:picMkLst>
+        </pc:picChg>
+        <pc:picChg chg="add">
+          <ac:chgData name="Shevlin, Blair" userId="84ba045b-a58b-4124-82eb-e2fd3a9b1d68" providerId="ADAL" clId="{30024126-5384-4DA1-8B4F-6CA6F8B40A7D}" dt="2026-06-03T16:50:05.995" v="190" actId="22"/>
+          <ac:picMkLst>
+            <pc:docMk/>
+            <pc:sldMk cId="3203209101" sldId="258"/>
+            <ac:picMk id="7" creationId="{CAFFE8FE-E1DE-8B41-FC25-CADB2D12F480}"/>
+          </ac:picMkLst>
+        </pc:picChg>
+      </pc:sldChg>
+      <pc:sldChg chg="addSp delSp modSp mod">
+        <pc:chgData name="Shevlin, Blair" userId="84ba045b-a58b-4124-82eb-e2fd3a9b1d68" providerId="ADAL" clId="{30024126-5384-4DA1-8B4F-6CA6F8B40A7D}" dt="2026-06-03T16:30:52.125" v="162" actId="1038"/>
+        <pc:sldMkLst>
+          <pc:docMk/>
+          <pc:sldMk cId="3281441240" sldId="259"/>
+        </pc:sldMkLst>
+        <pc:spChg chg="mod">
+          <ac:chgData name="Shevlin, Blair" userId="84ba045b-a58b-4124-82eb-e2fd3a9b1d68" providerId="ADAL" clId="{30024126-5384-4DA1-8B4F-6CA6F8B40A7D}" dt="2026-06-03T16:19:24.062" v="42" actId="1076"/>
+          <ac:spMkLst>
+            <pc:docMk/>
+            <pc:sldMk cId="3281441240" sldId="259"/>
+            <ac:spMk id="31" creationId="{DCC8EF68-820F-8D22-3915-8E36D67CBB13}"/>
+          </ac:spMkLst>
+        </pc:spChg>
+        <pc:spChg chg="mod">
+          <ac:chgData name="Shevlin, Blair" userId="84ba045b-a58b-4124-82eb-e2fd3a9b1d68" providerId="ADAL" clId="{30024126-5384-4DA1-8B4F-6CA6F8B40A7D}" dt="2026-06-03T16:19:31.939" v="50" actId="1038"/>
+          <ac:spMkLst>
+            <pc:docMk/>
+            <pc:sldMk cId="3281441240" sldId="259"/>
+            <ac:spMk id="33" creationId="{59B915EE-2513-C52E-B3D1-E920ADD53019}"/>
+          </ac:spMkLst>
+        </pc:spChg>
+        <pc:spChg chg="mod">
+          <ac:chgData name="Shevlin, Blair" userId="84ba045b-a58b-4124-82eb-e2fd3a9b1d68" providerId="ADAL" clId="{30024126-5384-4DA1-8B4F-6CA6F8B40A7D}" dt="2026-06-03T16:19:44.675" v="86" actId="1038"/>
+          <ac:spMkLst>
+            <pc:docMk/>
+            <pc:sldMk cId="3281441240" sldId="259"/>
+            <ac:spMk id="34" creationId="{D7D55550-7ABF-87B0-59E4-AE3179137BF9}"/>
+          </ac:spMkLst>
+        </pc:spChg>
+        <pc:spChg chg="mod">
+          <ac:chgData name="Shevlin, Blair" userId="84ba045b-a58b-4124-82eb-e2fd3a9b1d68" providerId="ADAL" clId="{30024126-5384-4DA1-8B4F-6CA6F8B40A7D}" dt="2026-06-03T16:19:54.953" v="90" actId="1038"/>
+          <ac:spMkLst>
+            <pc:docMk/>
+            <pc:sldMk cId="3281441240" sldId="259"/>
+            <ac:spMk id="35" creationId="{88F0D72A-F65A-F366-E2EB-77351076231B}"/>
+          </ac:spMkLst>
+        </pc:spChg>
+        <pc:spChg chg="mod">
+          <ac:chgData name="Shevlin, Blair" userId="84ba045b-a58b-4124-82eb-e2fd3a9b1d68" providerId="ADAL" clId="{30024126-5384-4DA1-8B4F-6CA6F8B40A7D}" dt="2026-06-03T16:19:06.924" v="32" actId="1038"/>
+          <ac:spMkLst>
+            <pc:docMk/>
+            <pc:sldMk cId="3281441240" sldId="259"/>
+            <ac:spMk id="36" creationId="{D70A26AB-A61B-2E05-5BB0-6240E84DD1C3}"/>
+          </ac:spMkLst>
+        </pc:spChg>
+        <pc:spChg chg="mod">
+          <ac:chgData name="Shevlin, Blair" userId="84ba045b-a58b-4124-82eb-e2fd3a9b1d68" providerId="ADAL" clId="{30024126-5384-4DA1-8B4F-6CA6F8B40A7D}" dt="2026-06-03T16:30:20.249" v="157" actId="1076"/>
+          <ac:spMkLst>
+            <pc:docMk/>
+            <pc:sldMk cId="3281441240" sldId="259"/>
+            <ac:spMk id="41" creationId="{E12DFFD4-9418-B31D-1F90-667619071005}"/>
+          </ac:spMkLst>
+        </pc:spChg>
+        <pc:spChg chg="mod">
+          <ac:chgData name="Shevlin, Blair" userId="84ba045b-a58b-4124-82eb-e2fd3a9b1d68" providerId="ADAL" clId="{30024126-5384-4DA1-8B4F-6CA6F8B40A7D}" dt="2026-06-03T16:30:15.639" v="155" actId="1076"/>
+          <ac:spMkLst>
+            <pc:docMk/>
+            <pc:sldMk cId="3281441240" sldId="259"/>
+            <ac:spMk id="42" creationId="{DC87A60B-C3D0-AB77-394E-EB56C72D9909}"/>
+          </ac:spMkLst>
+        </pc:spChg>
+        <pc:spChg chg="mod">
+          <ac:chgData name="Shevlin, Blair" userId="84ba045b-a58b-4124-82eb-e2fd3a9b1d68" providerId="ADAL" clId="{30024126-5384-4DA1-8B4F-6CA6F8B40A7D}" dt="2026-06-03T16:30:17.829" v="156" actId="1038"/>
+          <ac:spMkLst>
+            <pc:docMk/>
+            <pc:sldMk cId="3281441240" sldId="259"/>
+            <ac:spMk id="43" creationId="{E7403A25-E369-EDB1-1DE0-3798D49BBEF1}"/>
+          </ac:spMkLst>
+        </pc:spChg>
+        <pc:spChg chg="mod">
+          <ac:chgData name="Shevlin, Blair" userId="84ba045b-a58b-4124-82eb-e2fd3a9b1d68" providerId="ADAL" clId="{30024126-5384-4DA1-8B4F-6CA6F8B40A7D}" dt="2026-06-03T16:30:52.125" v="162" actId="1038"/>
+          <ac:spMkLst>
+            <pc:docMk/>
+            <pc:sldMk cId="3281441240" sldId="259"/>
+            <ac:spMk id="44" creationId="{0159184C-D43D-D750-E9F9-35D8B6E20CF2}"/>
+          </ac:spMkLst>
+        </pc:spChg>
+        <pc:spChg chg="mod">
+          <ac:chgData name="Shevlin, Blair" userId="84ba045b-a58b-4124-82eb-e2fd3a9b1d68" providerId="ADAL" clId="{30024126-5384-4DA1-8B4F-6CA6F8B40A7D}" dt="2026-06-03T16:23:44.421" v="151" actId="1036"/>
+          <ac:spMkLst>
+            <pc:docMk/>
+            <pc:sldMk cId="3281441240" sldId="259"/>
+            <ac:spMk id="51" creationId="{0EC1366E-EB5D-F027-35FF-BCF0C104C3A6}"/>
+          </ac:spMkLst>
+        </pc:spChg>
+        <pc:spChg chg="mod">
+          <ac:chgData name="Shevlin, Blair" userId="84ba045b-a58b-4124-82eb-e2fd3a9b1d68" providerId="ADAL" clId="{30024126-5384-4DA1-8B4F-6CA6F8B40A7D}" dt="2026-06-03T16:30:50.062" v="161" actId="1037"/>
+          <ac:spMkLst>
+            <pc:docMk/>
+            <pc:sldMk cId="3281441240" sldId="259"/>
+            <ac:spMk id="52" creationId="{B1935F84-5ED1-1404-CEE7-531014DD809A}"/>
+          </ac:spMkLst>
+        </pc:spChg>
+        <pc:spChg chg="mod">
+          <ac:chgData name="Shevlin, Blair" userId="84ba045b-a58b-4124-82eb-e2fd3a9b1d68" providerId="ADAL" clId="{30024126-5384-4DA1-8B4F-6CA6F8B40A7D}" dt="2026-06-03T16:19:30.081" v="49" actId="1037"/>
+          <ac:spMkLst>
+            <pc:docMk/>
+            <pc:sldMk cId="3281441240" sldId="259"/>
+            <ac:spMk id="53" creationId="{13C63F03-6382-5D78-945E-7E491826841D}"/>
+          </ac:spMkLst>
+        </pc:spChg>
+        <pc:picChg chg="add mod">
+          <ac:chgData name="Shevlin, Blair" userId="84ba045b-a58b-4124-82eb-e2fd3a9b1d68" providerId="ADAL" clId="{30024126-5384-4DA1-8B4F-6CA6F8B40A7D}" dt="2026-06-03T13:31:50.687" v="4"/>
+          <ac:picMkLst>
+            <pc:docMk/>
+            <pc:sldMk cId="3281441240" sldId="259"/>
+            <ac:picMk id="2" creationId="{F70114E5-389A-8E5A-6AAF-ADE9E179AF67}"/>
+          </ac:picMkLst>
+        </pc:picChg>
+        <pc:picChg chg="add mod ord">
+          <ac:chgData name="Shevlin, Blair" userId="84ba045b-a58b-4124-82eb-e2fd3a9b1d68" providerId="ADAL" clId="{30024126-5384-4DA1-8B4F-6CA6F8B40A7D}" dt="2026-06-03T16:18:04.645" v="13" actId="167"/>
+          <ac:picMkLst>
+            <pc:docMk/>
+            <pc:sldMk cId="3281441240" sldId="259"/>
+            <ac:picMk id="3" creationId="{57C3EF67-DA37-51B5-037A-E3ECF6B50FFE}"/>
+          </ac:picMkLst>
+        </pc:picChg>
+        <pc:picChg chg="add del">
+          <ac:chgData name="Shevlin, Blair" userId="84ba045b-a58b-4124-82eb-e2fd3a9b1d68" providerId="ADAL" clId="{30024126-5384-4DA1-8B4F-6CA6F8B40A7D}" dt="2026-06-03T16:18:24.126" v="16" actId="478"/>
+          <ac:picMkLst>
+            <pc:docMk/>
+            <pc:sldMk cId="3281441240" sldId="259"/>
+            <ac:picMk id="5" creationId="{C67E33CD-0B6E-54D9-8F21-9548D97ADF83}"/>
+          </ac:picMkLst>
+        </pc:picChg>
+        <pc:picChg chg="add del mod ord">
+          <ac:chgData name="Shevlin, Blair" userId="84ba045b-a58b-4124-82eb-e2fd3a9b1d68" providerId="ADAL" clId="{30024126-5384-4DA1-8B4F-6CA6F8B40A7D}" dt="2026-06-03T16:22:13.828" v="114" actId="478"/>
+          <ac:picMkLst>
+            <pc:docMk/>
+            <pc:sldMk cId="3281441240" sldId="259"/>
+            <ac:picMk id="7" creationId="{AA6AAEAA-471A-0284-101E-68C6620C2497}"/>
+          </ac:picMkLst>
+        </pc:picChg>
+        <pc:picChg chg="add del mod">
+          <ac:chgData name="Shevlin, Blair" userId="84ba045b-a58b-4124-82eb-e2fd3a9b1d68" providerId="ADAL" clId="{30024126-5384-4DA1-8B4F-6CA6F8B40A7D}" dt="2026-06-03T16:22:34.253" v="120" actId="931"/>
+          <ac:picMkLst>
+            <pc:docMk/>
+            <pc:sldMk cId="3281441240" sldId="259"/>
+            <ac:picMk id="9" creationId="{B7090FC9-9F86-307F-E6CE-25485691F54D}"/>
+          </ac:picMkLst>
+        </pc:picChg>
+        <pc:picChg chg="add mod ord">
+          <ac:chgData name="Shevlin, Blair" userId="84ba045b-a58b-4124-82eb-e2fd3a9b1d68" providerId="ADAL" clId="{30024126-5384-4DA1-8B4F-6CA6F8B40A7D}" dt="2026-06-03T16:23:38.439" v="138" actId="1035"/>
+          <ac:picMkLst>
+            <pc:docMk/>
+            <pc:sldMk cId="3281441240" sldId="259"/>
+            <ac:picMk id="11" creationId="{9E6FE339-BC14-1D99-2393-B60158493A43}"/>
+          </ac:picMkLst>
+        </pc:picChg>
+        <pc:picChg chg="del">
+          <ac:chgData name="Shevlin, Blair" userId="84ba045b-a58b-4124-82eb-e2fd3a9b1d68" providerId="ADAL" clId="{30024126-5384-4DA1-8B4F-6CA6F8B40A7D}" dt="2026-06-03T13:31:50.260" v="3" actId="478"/>
+          <ac:picMkLst>
+            <pc:docMk/>
+            <pc:sldMk cId="3281441240" sldId="259"/>
+            <ac:picMk id="49" creationId="{E5A99BE1-CC9E-5D1B-E3AC-F5EDFC732593}"/>
+          </ac:picMkLst>
+        </pc:picChg>
+        <pc:picChg chg="add del">
+          <ac:chgData name="Shevlin, Blair" userId="84ba045b-a58b-4124-82eb-e2fd3a9b1d68" providerId="ADAL" clId="{30024126-5384-4DA1-8B4F-6CA6F8B40A7D}" dt="2026-06-03T16:18:34.376" v="18" actId="478"/>
+          <ac:picMkLst>
+            <pc:docMk/>
+            <pc:sldMk cId="3281441240" sldId="259"/>
+            <ac:picMk id="50" creationId="{D3A1C076-BA72-4086-C40B-6E2A2DBE098E}"/>
+          </ac:picMkLst>
+        </pc:picChg>
+      </pc:sldChg>
+      <pc:sldChg chg="addSp delSp modSp mod">
+        <pc:chgData name="Shevlin, Blair" userId="84ba045b-a58b-4124-82eb-e2fd3a9b1d68" providerId="ADAL" clId="{30024126-5384-4DA1-8B4F-6CA6F8B40A7D}" dt="2026-06-03T16:33:26.424" v="188" actId="478"/>
+        <pc:sldMkLst>
+          <pc:docMk/>
+          <pc:sldMk cId="593674813" sldId="260"/>
+        </pc:sldMkLst>
+        <pc:spChg chg="ord">
+          <ac:chgData name="Shevlin, Blair" userId="84ba045b-a58b-4124-82eb-e2fd3a9b1d68" providerId="ADAL" clId="{30024126-5384-4DA1-8B4F-6CA6F8B40A7D}" dt="2026-06-03T16:32:34.369" v="179" actId="167"/>
+          <ac:spMkLst>
+            <pc:docMk/>
+            <pc:sldMk cId="593674813" sldId="260"/>
+            <ac:spMk id="23" creationId="{0F8ADCFE-9200-FCA0-0BAA-1B0ADBA8DE64}"/>
+          </ac:spMkLst>
+        </pc:spChg>
+        <pc:spChg chg="del">
+          <ac:chgData name="Shevlin, Blair" userId="84ba045b-a58b-4124-82eb-e2fd3a9b1d68" providerId="ADAL" clId="{30024126-5384-4DA1-8B4F-6CA6F8B40A7D}" dt="2026-06-03T16:33:19.347" v="185" actId="478"/>
+          <ac:spMkLst>
+            <pc:docMk/>
+            <pc:sldMk cId="593674813" sldId="260"/>
+            <ac:spMk id="40" creationId="{7DF7E310-871F-22CC-A88E-AAF1872DDC03}"/>
+          </ac:spMkLst>
+        </pc:spChg>
+        <pc:spChg chg="add del ord">
+          <ac:chgData name="Shevlin, Blair" userId="84ba045b-a58b-4124-82eb-e2fd3a9b1d68" providerId="ADAL" clId="{30024126-5384-4DA1-8B4F-6CA6F8B40A7D}" dt="2026-06-03T16:32:02.700" v="173" actId="167"/>
+          <ac:spMkLst>
+            <pc:docMk/>
+            <pc:sldMk cId="593674813" sldId="260"/>
+            <ac:spMk id="52" creationId="{70150D60-4F54-151F-75FE-769880A3F36A}"/>
+          </ac:spMkLst>
+        </pc:spChg>
+        <pc:spChg chg="ord">
+          <ac:chgData name="Shevlin, Blair" userId="84ba045b-a58b-4124-82eb-e2fd3a9b1d68" providerId="ADAL" clId="{30024126-5384-4DA1-8B4F-6CA6F8B40A7D}" dt="2026-06-03T16:32:59.292" v="182" actId="167"/>
+          <ac:spMkLst>
+            <pc:docMk/>
+            <pc:sldMk cId="593674813" sldId="260"/>
+            <ac:spMk id="55" creationId="{54FE9F9D-1305-4E89-A251-D40147C3FFF0}"/>
+          </ac:spMkLst>
+        </pc:spChg>
+        <pc:spChg chg="del">
+          <ac:chgData name="Shevlin, Blair" userId="84ba045b-a58b-4124-82eb-e2fd3a9b1d68" providerId="ADAL" clId="{30024126-5384-4DA1-8B4F-6CA6F8B40A7D}" dt="2026-06-03T16:31:37.736" v="168" actId="478"/>
+          <ac:spMkLst>
+            <pc:docMk/>
+            <pc:sldMk cId="593674813" sldId="260"/>
+            <ac:spMk id="61" creationId="{A61839B7-DAFE-3861-2915-FF3BBFE882EE}"/>
+          </ac:spMkLst>
+        </pc:spChg>
+        <pc:spChg chg="del">
+          <ac:chgData name="Shevlin, Blair" userId="84ba045b-a58b-4124-82eb-e2fd3a9b1d68" providerId="ADAL" clId="{30024126-5384-4DA1-8B4F-6CA6F8B40A7D}" dt="2026-06-03T16:32:35.923" v="180" actId="478"/>
+          <ac:spMkLst>
+            <pc:docMk/>
+            <pc:sldMk cId="593674813" sldId="260"/>
+            <ac:spMk id="64" creationId="{20612AAA-99CF-BD36-5718-6E0731D206FD}"/>
+          </ac:spMkLst>
+        </pc:spChg>
+        <pc:spChg chg="del">
+          <ac:chgData name="Shevlin, Blair" userId="84ba045b-a58b-4124-82eb-e2fd3a9b1d68" providerId="ADAL" clId="{30024126-5384-4DA1-8B4F-6CA6F8B40A7D}" dt="2026-06-03T16:31:40.234" v="170" actId="478"/>
+          <ac:spMkLst>
+            <pc:docMk/>
+            <pc:sldMk cId="593674813" sldId="260"/>
+            <ac:spMk id="65" creationId="{4BAA1A3C-7515-2661-A919-8C2E361DA147}"/>
+          </ac:spMkLst>
+        </pc:spChg>
+        <pc:spChg chg="del">
+          <ac:chgData name="Shevlin, Blair" userId="84ba045b-a58b-4124-82eb-e2fd3a9b1d68" providerId="ADAL" clId="{30024126-5384-4DA1-8B4F-6CA6F8B40A7D}" dt="2026-06-03T16:31:39.454" v="169" actId="478"/>
+          <ac:spMkLst>
+            <pc:docMk/>
+            <pc:sldMk cId="593674813" sldId="260"/>
+            <ac:spMk id="66" creationId="{338D48C9-DB93-4220-0181-41594BE35CD1}"/>
+          </ac:spMkLst>
+        </pc:spChg>
+        <pc:spChg chg="del">
+          <ac:chgData name="Shevlin, Blair" userId="84ba045b-a58b-4124-82eb-e2fd3a9b1d68" providerId="ADAL" clId="{30024126-5384-4DA1-8B4F-6CA6F8B40A7D}" dt="2026-06-03T16:33:20.893" v="186" actId="478"/>
+          <ac:spMkLst>
+            <pc:docMk/>
+            <pc:sldMk cId="593674813" sldId="260"/>
+            <ac:spMk id="71" creationId="{474013FA-5654-716D-30BA-FCC43AFA5D3F}"/>
+          </ac:spMkLst>
+        </pc:spChg>
+        <pc:spChg chg="del">
+          <ac:chgData name="Shevlin, Blair" userId="84ba045b-a58b-4124-82eb-e2fd3a9b1d68" providerId="ADAL" clId="{30024126-5384-4DA1-8B4F-6CA6F8B40A7D}" dt="2026-06-03T16:33:21.893" v="187" actId="478"/>
+          <ac:spMkLst>
+            <pc:docMk/>
+            <pc:sldMk cId="593674813" sldId="260"/>
+            <ac:spMk id="72" creationId="{9D4138A3-4CD4-5847-2AFF-8D2A8400F412}"/>
+          </ac:spMkLst>
+        </pc:spChg>
+        <pc:spChg chg="del">
+          <ac:chgData name="Shevlin, Blair" userId="84ba045b-a58b-4124-82eb-e2fd3a9b1d68" providerId="ADAL" clId="{30024126-5384-4DA1-8B4F-6CA6F8B40A7D}" dt="2026-06-03T16:32:05.578" v="174" actId="478"/>
+          <ac:spMkLst>
+            <pc:docMk/>
+            <pc:sldMk cId="593674813" sldId="260"/>
+            <ac:spMk id="73" creationId="{4E746768-9244-72F4-3DBD-754C96BF29CD}"/>
+          </ac:spMkLst>
+        </pc:spChg>
+        <pc:spChg chg="del">
+          <ac:chgData name="Shevlin, Blair" userId="84ba045b-a58b-4124-82eb-e2fd3a9b1d68" providerId="ADAL" clId="{30024126-5384-4DA1-8B4F-6CA6F8B40A7D}" dt="2026-06-03T16:33:01.735" v="183" actId="478"/>
+          <ac:spMkLst>
+            <pc:docMk/>
+            <pc:sldMk cId="593674813" sldId="260"/>
+            <ac:spMk id="74" creationId="{72427C7A-439F-E8D0-991A-1561E18528BE}"/>
+          </ac:spMkLst>
+        </pc:spChg>
+        <pc:spChg chg="del">
+          <ac:chgData name="Shevlin, Blair" userId="84ba045b-a58b-4124-82eb-e2fd3a9b1d68" providerId="ADAL" clId="{30024126-5384-4DA1-8B4F-6CA6F8B40A7D}" dt="2026-06-03T16:32:28.407" v="178" actId="478"/>
+          <ac:spMkLst>
+            <pc:docMk/>
+            <pc:sldMk cId="593674813" sldId="260"/>
+            <ac:spMk id="77" creationId="{BC5174A2-56C4-FDFA-402F-45C25102B037}"/>
+          </ac:spMkLst>
+        </pc:spChg>
+        <pc:spChg chg="del">
+          <ac:chgData name="Shevlin, Blair" userId="84ba045b-a58b-4124-82eb-e2fd3a9b1d68" providerId="ADAL" clId="{30024126-5384-4DA1-8B4F-6CA6F8B40A7D}" dt="2026-06-03T16:33:26.424" v="188" actId="478"/>
+          <ac:spMkLst>
+            <pc:docMk/>
+            <pc:sldMk cId="593674813" sldId="260"/>
+            <ac:spMk id="78" creationId="{21165659-955E-9D88-01B4-CA894A15270A}"/>
+          </ac:spMkLst>
+        </pc:spChg>
+        <pc:spChg chg="del">
+          <ac:chgData name="Shevlin, Blair" userId="84ba045b-a58b-4124-82eb-e2fd3a9b1d68" providerId="ADAL" clId="{30024126-5384-4DA1-8B4F-6CA6F8B40A7D}" dt="2026-06-03T16:31:34.019" v="167" actId="478"/>
+          <ac:spMkLst>
+            <pc:docMk/>
+            <pc:sldMk cId="593674813" sldId="260"/>
+            <ac:spMk id="79" creationId="{37654A0D-9B9E-846C-D653-B4F27A932638}"/>
+          </ac:spMkLst>
+        </pc:spChg>
+        <pc:picChg chg="add mod">
+          <ac:chgData name="Shevlin, Blair" userId="84ba045b-a58b-4124-82eb-e2fd3a9b1d68" providerId="ADAL" clId="{30024126-5384-4DA1-8B4F-6CA6F8B40A7D}" dt="2026-06-03T13:31:55.655" v="6"/>
+          <ac:picMkLst>
+            <pc:docMk/>
+            <pc:sldMk cId="593674813" sldId="260"/>
+            <ac:picMk id="2" creationId="{F9E96C2E-C448-7163-F555-B762839337B0}"/>
+          </ac:picMkLst>
+        </pc:picChg>
+        <pc:picChg chg="add mod ord">
+          <ac:chgData name="Shevlin, Blair" userId="84ba045b-a58b-4124-82eb-e2fd3a9b1d68" providerId="ADAL" clId="{30024126-5384-4DA1-8B4F-6CA6F8B40A7D}" dt="2026-06-03T16:33:05.040" v="184" actId="167"/>
+          <ac:picMkLst>
+            <pc:docMk/>
+            <pc:sldMk cId="593674813" sldId="260"/>
+            <ac:picMk id="4" creationId="{7CDF5EDF-110B-65D5-A445-BE679A0F2661}"/>
+          </ac:picMkLst>
+        </pc:picChg>
+        <pc:picChg chg="del">
+          <ac:chgData name="Shevlin, Blair" userId="84ba045b-a58b-4124-82eb-e2fd3a9b1d68" providerId="ADAL" clId="{30024126-5384-4DA1-8B4F-6CA6F8B40A7D}" dt="2026-06-03T13:31:55.373" v="5" actId="478"/>
+          <ac:picMkLst>
+            <pc:docMk/>
+            <pc:sldMk cId="593674813" sldId="260"/>
+            <ac:picMk id="56" creationId="{1267F596-4A7B-8F7C-C938-2F91832184F5}"/>
+          </ac:picMkLst>
+        </pc:picChg>
+        <pc:picChg chg="del">
+          <ac:chgData name="Shevlin, Blair" userId="84ba045b-a58b-4124-82eb-e2fd3a9b1d68" providerId="ADAL" clId="{30024126-5384-4DA1-8B4F-6CA6F8B40A7D}" dt="2026-06-03T16:31:18.672" v="163" actId="478"/>
+          <ac:picMkLst>
+            <pc:docMk/>
+            <pc:sldMk cId="593674813" sldId="260"/>
+            <ac:picMk id="58" creationId="{371FC2AC-04FD-A68C-F9EC-A9E2B640F846}"/>
+          </ac:picMkLst>
+        </pc:picChg>
+      </pc:sldChg>
+    </pc:docChg>
+  </pc:docChgLst>
+</pc:chgInfo>
+</file>
+
+<file path=ppt/notesMasters/notesMaster1.xml><?xml version="1.0" encoding="utf-8"?>
+<p:notesMaster xmlns:a="http://schemas.openxmlformats.org/drawingml/2006/main" xmlns:r="http://schemas.openxmlformats.org/officeDocument/2006/relationships" xmlns:p="http://schemas.openxmlformats.org/presentationml/2006/main">
+  <p:cSld>
+    <p:bg>
+      <p:bgRef idx="1001">
+        <a:schemeClr val="bg1"/>
+      </p:bgRef>
+    </p:bg>
+    <p:spTree>
+      <p:nvGrpSpPr>
+        <p:cNvPr id="1" name=""/>
+        <p:cNvGrpSpPr/>
+        <p:nvPr/>
+      </p:nvGrpSpPr>
+      <p:grpSpPr>
+        <a:xfrm>
+          <a:off x="0" y="0"/>
+          <a:ext cx="0" cy="0"/>
+          <a:chOff x="0" y="0"/>
+          <a:chExt cx="0" cy="0"/>
+        </a:xfrm>
+      </p:grpSpPr>
+      <p:sp>
+        <p:nvSpPr>
+          <p:cNvPr id="2" name="Header Placeholder 1"/>
+          <p:cNvSpPr>
+            <a:spLocks noGrp="1"/>
+          </p:cNvSpPr>
+          <p:nvPr>
+            <p:ph type="hdr" sz="quarter"/>
+          </p:nvPr>
+        </p:nvSpPr>
+        <p:spPr>
+          <a:xfrm>
+            <a:off x="0" y="0"/>
+            <a:ext cx="2971800" cy="458788"/>
+          </a:xfrm>
+          <a:prstGeom prst="rect">
+            <a:avLst/>
+          </a:prstGeom>
+        </p:spPr>
+        <p:txBody>
+          <a:bodyPr vert="horz" lIns="91440" tIns="45720" rIns="91440" bIns="45720" rtlCol="0"/>
+          <a:lstStyle>
+            <a:lvl1pPr algn="l">
+              <a:defRPr sz="1200"/>
+            </a:lvl1pPr>
+          </a:lstStyle>
+          <a:p>
+            <a:endParaRPr lang="en-US"/>
+          </a:p>
+        </p:txBody>
+      </p:sp>
+      <p:sp>
+        <p:nvSpPr>
+          <p:cNvPr id="3" name="Date Placeholder 2"/>
+          <p:cNvSpPr>
+            <a:spLocks noGrp="1"/>
+          </p:cNvSpPr>
+          <p:nvPr>
+            <p:ph type="dt" idx="1"/>
+          </p:nvPr>
+        </p:nvSpPr>
+        <p:spPr>
+          <a:xfrm>
+            <a:off x="3884613" y="0"/>
+            <a:ext cx="2971800" cy="458788"/>
+          </a:xfrm>
+          <a:prstGeom prst="rect">
+            <a:avLst/>
+          </a:prstGeom>
+        </p:spPr>
+        <p:txBody>
+          <a:bodyPr vert="horz" lIns="91440" tIns="45720" rIns="91440" bIns="45720" rtlCol="0"/>
+          <a:lstStyle>
+            <a:lvl1pPr algn="r">
+              <a:defRPr sz="1200"/>
+            </a:lvl1pPr>
+          </a:lstStyle>
+          <a:p>
+            <a:fld id="{1D3C2DB3-9927-4112-BC21-C81DE9AEE813}" type="datetimeFigureOut">
+              <a:rPr lang="en-US" smtClean="0"/>
+              <a:t>6/3/2026</a:t>
+            </a:fld>
+            <a:endParaRPr lang="en-US"/>
+          </a:p>
+        </p:txBody>
+      </p:sp>
+      <p:sp>
+        <p:nvSpPr>
+          <p:cNvPr id="4" name="Slide Image Placeholder 3"/>
+          <p:cNvSpPr>
+            <a:spLocks noGrp="1" noRot="1" noChangeAspect="1"/>
+          </p:cNvSpPr>
+          <p:nvPr>
+            <p:ph type="sldImg" idx="2"/>
+          </p:nvPr>
+        </p:nvSpPr>
+        <p:spPr>
+          <a:xfrm>
+            <a:off x="685800" y="1143000"/>
+            <a:ext cx="5486400" cy="3086100"/>
+          </a:xfrm>
+          <a:prstGeom prst="rect">
+            <a:avLst/>
+          </a:prstGeom>
+          <a:noFill/>
+          <a:ln w="12700">
+            <a:solidFill>
+              <a:prstClr val="black"/>
+            </a:solidFill>
+          </a:ln>
+        </p:spPr>
+        <p:txBody>
+          <a:bodyPr vert="horz" lIns="91440" tIns="45720" rIns="91440" bIns="45720" rtlCol="0" anchor="ctr"/>
+          <a:lstStyle/>
+          <a:p>
+            <a:endParaRPr lang="en-US"/>
+          </a:p>
+        </p:txBody>
+      </p:sp>
+      <p:sp>
+        <p:nvSpPr>
+          <p:cNvPr id="5" name="Notes Placeholder 4"/>
+          <p:cNvSpPr>
+            <a:spLocks noGrp="1"/>
+          </p:cNvSpPr>
+          <p:nvPr>
+            <p:ph type="body" sz="quarter" idx="3"/>
+          </p:nvPr>
+        </p:nvSpPr>
+        <p:spPr>
+          <a:xfrm>
+            <a:off x="685800" y="4400550"/>
+            <a:ext cx="5486400" cy="3600450"/>
+          </a:xfrm>
+          <a:prstGeom prst="rect">
+            <a:avLst/>
+          </a:prstGeom>
+        </p:spPr>
+        <p:txBody>
+          <a:bodyPr vert="horz" lIns="91440" tIns="45720" rIns="91440" bIns="45720" rtlCol="0"/>
+          <a:lstStyle/>
+          <a:p>
+            <a:pPr lvl="0"/>
+            <a:r>
+              <a:rPr lang="en-US"/>
+              <a:t>Click to edit Master text styles</a:t>
+            </a:r>
+          </a:p>
+          <a:p>
+            <a:pPr lvl="1"/>
+            <a:r>
+              <a:rPr lang="en-US"/>
+              <a:t>Second level</a:t>
+            </a:r>
+          </a:p>
+          <a:p>
+            <a:pPr lvl="2"/>
+            <a:r>
+              <a:rPr lang="en-US"/>
+              <a:t>Third level</a:t>
+            </a:r>
+          </a:p>
+          <a:p>
+            <a:pPr lvl="3"/>
+            <a:r>
+              <a:rPr lang="en-US"/>
+              <a:t>Fourth level</a:t>
+            </a:r>
+          </a:p>
+          <a:p>
+            <a:pPr lvl="4"/>
+            <a:r>
+              <a:rPr lang="en-US"/>
+              <a:t>Fifth level</a:t>
+            </a:r>
+          </a:p>
+        </p:txBody>
+      </p:sp>
+      <p:sp>
+        <p:nvSpPr>
+          <p:cNvPr id="6" name="Footer Placeholder 5"/>
+          <p:cNvSpPr>
+            <a:spLocks noGrp="1"/>
+          </p:cNvSpPr>
+          <p:nvPr>
+            <p:ph type="ftr" sz="quarter" idx="4"/>
+          </p:nvPr>
+        </p:nvSpPr>
+        <p:spPr>
+          <a:xfrm>
+            <a:off x="0" y="8685213"/>
+            <a:ext cx="2971800" cy="458787"/>
+          </a:xfrm>
+          <a:prstGeom prst="rect">
+            <a:avLst/>
+          </a:prstGeom>
+        </p:spPr>
+        <p:txBody>
+          <a:bodyPr vert="horz" lIns="91440" tIns="45720" rIns="91440" bIns="45720" rtlCol="0" anchor="b"/>
+          <a:lstStyle>
+            <a:lvl1pPr algn="l">
+              <a:defRPr sz="1200"/>
+            </a:lvl1pPr>
+          </a:lstStyle>
+          <a:p>
+            <a:endParaRPr lang="en-US"/>
+          </a:p>
+        </p:txBody>
+      </p:sp>
+      <p:sp>
+        <p:nvSpPr>
+          <p:cNvPr id="7" name="Slide Number Placeholder 6"/>
+          <p:cNvSpPr>
+            <a:spLocks noGrp="1"/>
+          </p:cNvSpPr>
+          <p:nvPr>
+            <p:ph type="sldNum" sz="quarter" idx="5"/>
+          </p:nvPr>
+        </p:nvSpPr>
+        <p:spPr>
+          <a:xfrm>
+            <a:off x="3884613" y="8685213"/>
+            <a:ext cx="2971800" cy="458787"/>
+          </a:xfrm>
+          <a:prstGeom prst="rect">
+            <a:avLst/>
+          </a:prstGeom>
+        </p:spPr>
+        <p:txBody>
+          <a:bodyPr vert="horz" lIns="91440" tIns="45720" rIns="91440" bIns="45720" rtlCol="0" anchor="b"/>
+          <a:lstStyle>
+            <a:lvl1pPr algn="r">
+              <a:defRPr sz="1200"/>
+            </a:lvl1pPr>
+          </a:lstStyle>
+          <a:p>
+            <a:fld id="{1BC02516-BBE8-4529-BAEA-3F1096FFFC00}" type="slidenum">
+              <a:rPr lang="en-US" smtClean="0"/>
+              <a:t>‹#›</a:t>
+            </a:fld>
+            <a:endParaRPr lang="en-US"/>
+          </a:p>
+        </p:txBody>
+      </p:sp>
+    </p:spTree>
+    <p:extLst>
+      <p:ext uri="{BB962C8B-B14F-4D97-AF65-F5344CB8AC3E}">
+        <p14:creationId xmlns:p14="http://schemas.microsoft.com/office/powerpoint/2010/main" val="3065439911"/>
+      </p:ext>
+    </p:extLst>
+  </p:cSld>
+  <p:clrMap bg1="lt1" tx1="dk1" bg2="lt2" tx2="dk2" accent1="accent1" accent2="accent2" accent3="accent3" accent4="accent4" accent5="accent5" accent6="accent6" hlink="hlink" folHlink="folHlink"/>
+  <p:notesStyle>
+    <a:lvl1pPr marL="0" algn="l" defTabSz="914400" rtl="0" eaLnBrk="1" latinLnBrk="0" hangingPunct="1">
+      <a:defRPr sz="1200" kern="1200">
+        <a:solidFill>
+          <a:schemeClr val="tx1"/>
+        </a:solidFill>
+        <a:latin typeface="+mn-lt"/>
+        <a:ea typeface="+mn-ea"/>
+        <a:cs typeface="+mn-cs"/>
+      </a:defRPr>
+    </a:lvl1pPr>
+    <a:lvl2pPr marL="457200" algn="l" defTabSz="914400" rtl="0" eaLnBrk="1" latinLnBrk="0" hangingPunct="1">
+      <a:defRPr sz="1200" kern="1200">
+        <a:solidFill>
+          <a:schemeClr val="tx1"/>
+        </a:solidFill>
+        <a:latin typeface="+mn-lt"/>
+        <a:ea typeface="+mn-ea"/>
+        <a:cs typeface="+mn-cs"/>
+      </a:defRPr>
+    </a:lvl2pPr>
+    <a:lvl3pPr marL="914400" algn="l" defTabSz="914400" rtl="0" eaLnBrk="1" latinLnBrk="0" hangingPunct="1">
+      <a:defRPr sz="1200" kern="1200">
+        <a:solidFill>
+          <a:schemeClr val="tx1"/>
+        </a:solidFill>
+        <a:latin typeface="+mn-lt"/>
+        <a:ea typeface="+mn-ea"/>
+        <a:cs typeface="+mn-cs"/>
+      </a:defRPr>
+    </a:lvl3pPr>
+    <a:lvl4pPr marL="1371600" algn="l" defTabSz="914400" rtl="0" eaLnBrk="1" latinLnBrk="0" hangingPunct="1">
+      <a:defRPr sz="1200" kern="1200">
+        <a:solidFill>
+          <a:schemeClr val="tx1"/>
+        </a:solidFill>
+        <a:latin typeface="+mn-lt"/>
+        <a:ea typeface="+mn-ea"/>
+        <a:cs typeface="+mn-cs"/>
+      </a:defRPr>
+    </a:lvl4pPr>
+    <a:lvl5pPr marL="1828800" algn="l" defTabSz="914400" rtl="0" eaLnBrk="1" latinLnBrk="0" hangingPunct="1">
+      <a:defRPr sz="1200" kern="1200">
+        <a:solidFill>
+          <a:schemeClr val="tx1"/>
+        </a:solidFill>
+        <a:latin typeface="+mn-lt"/>
+        <a:ea typeface="+mn-ea"/>
+        <a:cs typeface="+mn-cs"/>
+      </a:defRPr>
+    </a:lvl5pPr>
+    <a:lvl6pPr marL="2286000" algn="l" defTabSz="914400" rtl="0" eaLnBrk="1" latinLnBrk="0" hangingPunct="1">
+      <a:defRPr sz="1200" kern="1200">
+        <a:solidFill>
+          <a:schemeClr val="tx1"/>
+        </a:solidFill>
+        <a:latin typeface="+mn-lt"/>
+        <a:ea typeface="+mn-ea"/>
+        <a:cs typeface="+mn-cs"/>
+      </a:defRPr>
+    </a:lvl6pPr>
+    <a:lvl7pPr marL="2743200" algn="l" defTabSz="914400" rtl="0" eaLnBrk="1" latinLnBrk="0" hangingPunct="1">
+      <a:defRPr sz="1200" kern="1200">
+        <a:solidFill>
+          <a:schemeClr val="tx1"/>
+        </a:solidFill>
+        <a:latin typeface="+mn-lt"/>
+        <a:ea typeface="+mn-ea"/>
+        <a:cs typeface="+mn-cs"/>
+      </a:defRPr>
+    </a:lvl7pPr>
+    <a:lvl8pPr marL="3200400" algn="l" defTabSz="914400" rtl="0" eaLnBrk="1" latinLnBrk="0" hangingPunct="1">
+      <a:defRPr sz="1200" kern="1200">
+        <a:solidFill>
+          <a:schemeClr val="tx1"/>
+        </a:solidFill>
+        <a:latin typeface="+mn-lt"/>
+        <a:ea typeface="+mn-ea"/>
+        <a:cs typeface="+mn-cs"/>
+      </a:defRPr>
+    </a:lvl8pPr>
+    <a:lvl9pPr marL="3657600" algn="l" defTabSz="914400" rtl="0" eaLnBrk="1" latinLnBrk="0" hangingPunct="1">
+      <a:defRPr sz="1200" kern="1200">
+        <a:solidFill>
+          <a:schemeClr val="tx1"/>
+        </a:solidFill>
+        <a:latin typeface="+mn-lt"/>
+        <a:ea typeface="+mn-ea"/>
+        <a:cs typeface="+mn-cs"/>
+      </a:defRPr>
+    </a:lvl9pPr>
+  </p:notesStyle>
+</p:notesMaster>
+</file>
+
+<file path=ppt/notesSlides/notesSlide1.xml><?xml version="1.0" encoding="utf-8"?>
+<p:notes xmlns:a="http://schemas.openxmlformats.org/drawingml/2006/main" xmlns:r="http://schemas.openxmlformats.org/officeDocument/2006/relationships" xmlns:p="http://schemas.openxmlformats.org/presentationml/2006/main">
+  <p:cSld>
+    <p:spTree>
+      <p:nvGrpSpPr>
+        <p:cNvPr id="1" name=""/>
+        <p:cNvGrpSpPr/>
+        <p:nvPr/>
+      </p:nvGrpSpPr>
+      <p:grpSpPr>
+        <a:xfrm>
+          <a:off x="0" y="0"/>
+          <a:ext cx="0" cy="0"/>
+          <a:chOff x="0" y="0"/>
+          <a:chExt cx="0" cy="0"/>
+        </a:xfrm>
+      </p:grpSpPr>
+      <p:sp>
+        <p:nvSpPr>
+          <p:cNvPr id="2" name="Slide Image Placeholder 1"/>
+          <p:cNvSpPr>
+            <a:spLocks noGrp="1" noRot="1" noChangeAspect="1"/>
+          </p:cNvSpPr>
+          <p:nvPr>
+            <p:ph type="sldImg"/>
+          </p:nvPr>
+        </p:nvSpPr>
+        <p:spPr/>
+      </p:sp>
+      <p:sp>
+        <p:nvSpPr>
+          <p:cNvPr id="3" name="Notes Placeholder 2"/>
+          <p:cNvSpPr>
+            <a:spLocks noGrp="1"/>
+          </p:cNvSpPr>
+          <p:nvPr>
+            <p:ph type="body" idx="1"/>
+          </p:nvPr>
+        </p:nvSpPr>
+        <p:spPr/>
+        <p:txBody>
+          <a:bodyPr/>
+          <a:lstStyle/>
+          <a:p>
+            <a:endParaRPr lang="en-US" dirty="0"/>
+          </a:p>
+        </p:txBody>
+      </p:sp>
+      <p:sp>
+        <p:nvSpPr>
+          <p:cNvPr id="4" name="Slide Number Placeholder 3"/>
+          <p:cNvSpPr>
+            <a:spLocks noGrp="1"/>
+          </p:cNvSpPr>
+          <p:nvPr>
+            <p:ph type="sldNum" sz="quarter" idx="5"/>
+          </p:nvPr>
+        </p:nvSpPr>
+        <p:spPr/>
+        <p:txBody>
+          <a:bodyPr/>
+          <a:lstStyle/>
+          <a:p>
+            <a:fld id="{1BC02516-BBE8-4529-BAEA-3F1096FFFC00}" type="slidenum">
+              <a:rPr lang="en-US" smtClean="0"/>
+              <a:t>2</a:t>
+            </a:fld>
+            <a:endParaRPr lang="en-US"/>
+          </a:p>
+        </p:txBody>
+      </p:sp>
+    </p:spTree>
+    <p:extLst>
+      <p:ext uri="{BB962C8B-B14F-4D97-AF65-F5344CB8AC3E}">
+        <p14:creationId xmlns:p14="http://schemas.microsoft.com/office/powerpoint/2010/main" val="259272216"/>
+      </p:ext>
+    </p:extLst>
+  </p:cSld>
+  <p:clrMapOvr>
+    <a:masterClrMapping/>
+  </p:clrMapOvr>
+</p:notes>
+</file>
+
 <file path=ppt/slideLayouts/slideLayout1.xml><?xml version="1.0" encoding="utf-8"?>
 <p:sldLayout xmlns:a="http://schemas.openxmlformats.org/drawingml/2006/main" xmlns:r="http://schemas.openxmlformats.org/officeDocument/2006/relationships" xmlns:p="http://schemas.openxmlformats.org/presentationml/2006/main" type="title" preserve="1">
   <p:cSld name="Title Slide">
@@ -262,7 +1188,7 @@
           <a:p>
             <a:fld id="{F2D78F70-D3ED-47EB-9390-309AABC3208D}" type="datetimeFigureOut">
               <a:rPr lang="en-US" smtClean="0"/>
-              <a:t>11/4/2025</a:t>
+              <a:t>6/3/2026</a:t>
             </a:fld>
             <a:endParaRPr lang="en-US"/>
           </a:p>
@@ -460,7 +1386,7 @@
           <a:p>
             <a:fld id="{F2D78F70-D3ED-47EB-9390-309AABC3208D}" type="datetimeFigureOut">
               <a:rPr lang="en-US" smtClean="0"/>
-              <a:t>11/4/2025</a:t>
+              <a:t>6/3/2026</a:t>
             </a:fld>
             <a:endParaRPr lang="en-US"/>
           </a:p>
@@ -668,7 +1594,7 @@
           <a:p>
             <a:fld id="{F2D78F70-D3ED-47EB-9390-309AABC3208D}" type="datetimeFigureOut">
               <a:rPr lang="en-US" smtClean="0"/>
-              <a:t>11/4/2025</a:t>
+              <a:t>6/3/2026</a:t>
             </a:fld>
             <a:endParaRPr lang="en-US"/>
           </a:p>
@@ -866,7 +1792,7 @@
           <a:p>
             <a:fld id="{F2D78F70-D3ED-47EB-9390-309AABC3208D}" type="datetimeFigureOut">
               <a:rPr lang="en-US" smtClean="0"/>
-              <a:t>11/4/2025</a:t>
+              <a:t>6/3/2026</a:t>
             </a:fld>
             <a:endParaRPr lang="en-US"/>
           </a:p>
@@ -1141,7 +2067,7 @@
           <a:p>
             <a:fld id="{F2D78F70-D3ED-47EB-9390-309AABC3208D}" type="datetimeFigureOut">
               <a:rPr lang="en-US" smtClean="0"/>
-              <a:t>11/4/2025</a:t>
+              <a:t>6/3/2026</a:t>
             </a:fld>
             <a:endParaRPr lang="en-US"/>
           </a:p>
@@ -1406,7 +2332,7 @@
           <a:p>
             <a:fld id="{F2D78F70-D3ED-47EB-9390-309AABC3208D}" type="datetimeFigureOut">
               <a:rPr lang="en-US" smtClean="0"/>
-              <a:t>11/4/2025</a:t>
+              <a:t>6/3/2026</a:t>
             </a:fld>
             <a:endParaRPr lang="en-US"/>
           </a:p>
@@ -1818,7 +2744,7 @@
           <a:p>
             <a:fld id="{F2D78F70-D3ED-47EB-9390-309AABC3208D}" type="datetimeFigureOut">
               <a:rPr lang="en-US" smtClean="0"/>
-              <a:t>11/4/2025</a:t>
+              <a:t>6/3/2026</a:t>
             </a:fld>
             <a:endParaRPr lang="en-US"/>
           </a:p>
@@ -1959,7 +2885,7 @@
           <a:p>
             <a:fld id="{F2D78F70-D3ED-47EB-9390-309AABC3208D}" type="datetimeFigureOut">
               <a:rPr lang="en-US" smtClean="0"/>
-              <a:t>11/4/2025</a:t>
+              <a:t>6/3/2026</a:t>
             </a:fld>
             <a:endParaRPr lang="en-US"/>
           </a:p>
@@ -2072,7 +2998,7 @@
           <a:p>
             <a:fld id="{F2D78F70-D3ED-47EB-9390-309AABC3208D}" type="datetimeFigureOut">
               <a:rPr lang="en-US" smtClean="0"/>
-              <a:t>11/4/2025</a:t>
+              <a:t>6/3/2026</a:t>
             </a:fld>
             <a:endParaRPr lang="en-US"/>
           </a:p>
@@ -2383,7 +3309,7 @@
           <a:p>
             <a:fld id="{F2D78F70-D3ED-47EB-9390-309AABC3208D}" type="datetimeFigureOut">
               <a:rPr lang="en-US" smtClean="0"/>
-              <a:t>11/4/2025</a:t>
+              <a:t>6/3/2026</a:t>
             </a:fld>
             <a:endParaRPr lang="en-US"/>
           </a:p>
@@ -2671,7 +3597,7 @@
           <a:p>
             <a:fld id="{F2D78F70-D3ED-47EB-9390-309AABC3208D}" type="datetimeFigureOut">
               <a:rPr lang="en-US" smtClean="0"/>
-              <a:t>11/4/2025</a:t>
+              <a:t>6/3/2026</a:t>
             </a:fld>
             <a:endParaRPr lang="en-US"/>
           </a:p>
@@ -2912,7 +3838,7 @@
           <a:p>
             <a:fld id="{F2D78F70-D3ED-47EB-9390-309AABC3208D}" type="datetimeFigureOut">
               <a:rPr lang="en-US" smtClean="0"/>
-              <a:t>11/4/2025</a:t>
+              <a:t>6/3/2026</a:t>
             </a:fld>
             <a:endParaRPr lang="en-US"/>
           </a:p>
@@ -3331,10 +4257,10 @@
       </p:grpSpPr>
       <p:pic>
         <p:nvPicPr>
-          <p:cNvPr id="5" name="Picture 4">
-            <a:extLst>
-              <a:ext uri="{FF2B5EF4-FFF2-40B4-BE49-F238E27FC236}">
-                <a16:creationId xmlns:a16="http://schemas.microsoft.com/office/drawing/2014/main" id="{69422AD6-F27B-5B5B-8473-AC420686B8A7}"/>
+          <p:cNvPr id="3" name="Picture 2">
+            <a:extLst>
+              <a:ext uri="{FF2B5EF4-FFF2-40B4-BE49-F238E27FC236}">
+                <a16:creationId xmlns:a16="http://schemas.microsoft.com/office/drawing/2014/main" id="{E7403EA9-C0D0-587D-D7F1-00A6CCA22D8D}"/>
               </a:ext>
             </a:extLst>
           </p:cNvPr>
@@ -3367,10 +4293,10 @@
       </p:pic>
       <p:pic>
         <p:nvPicPr>
-          <p:cNvPr id="10" name="Picture 9">
-            <a:extLst>
-              <a:ext uri="{FF2B5EF4-FFF2-40B4-BE49-F238E27FC236}">
-                <a16:creationId xmlns:a16="http://schemas.microsoft.com/office/drawing/2014/main" id="{72A6AD27-D11F-8AF4-5811-BC8CDAFA5420}"/>
+          <p:cNvPr id="4" name="Picture 3">
+            <a:extLst>
+              <a:ext uri="{FF2B5EF4-FFF2-40B4-BE49-F238E27FC236}">
+                <a16:creationId xmlns:a16="http://schemas.microsoft.com/office/drawing/2014/main" id="{2426AE97-51EC-3D86-5DEE-79745A7711B9}"/>
               </a:ext>
             </a:extLst>
           </p:cNvPr>
@@ -3393,7 +4319,7 @@
         </p:blipFill>
         <p:spPr>
           <a:xfrm>
-            <a:off x="0" y="0"/>
+            <a:off x="0" y="-33986"/>
             <a:ext cx="12192000" cy="3251200"/>
           </a:xfrm>
           <a:prstGeom prst="rect">
@@ -3439,10 +4365,10 @@
       </p:grpSpPr>
       <p:pic>
         <p:nvPicPr>
-          <p:cNvPr id="50" name="Picture 49">
-            <a:extLst>
-              <a:ext uri="{FF2B5EF4-FFF2-40B4-BE49-F238E27FC236}">
-                <a16:creationId xmlns:a16="http://schemas.microsoft.com/office/drawing/2014/main" id="{D3A1C076-BA72-4086-C40B-6E2A2DBE098E}"/>
+          <p:cNvPr id="11" name="Picture 10">
+            <a:extLst>
+              <a:ext uri="{FF2B5EF4-FFF2-40B4-BE49-F238E27FC236}">
+                <a16:creationId xmlns:a16="http://schemas.microsoft.com/office/drawing/2014/main" id="{9E6FE339-BC14-1D99-2393-B60158493A43}"/>
               </a:ext>
             </a:extLst>
           </p:cNvPr>
@@ -3452,7 +4378,7 @@
           <p:nvPr/>
         </p:nvPicPr>
         <p:blipFill>
-          <a:blip r:embed="rId2">
+          <a:blip r:embed="rId3">
             <a:extLst>
               <a:ext uri="{28A0092B-C50C-407E-A947-70E740481C1C}">
                 <a14:useLocalDpi xmlns:a14="http://schemas.microsoft.com/office/drawing/2010/main" val="0"/>
@@ -3465,7 +4391,7 @@
         </p:blipFill>
         <p:spPr>
           <a:xfrm>
-            <a:off x="953" y="0"/>
+            <a:off x="0" y="0"/>
             <a:ext cx="12192000" cy="3251200"/>
           </a:xfrm>
           <a:prstGeom prst="rect">
@@ -3595,7 +4521,7 @@
         </p:nvSpPr>
         <p:spPr>
           <a:xfrm>
-            <a:off x="1187125" y="663899"/>
+            <a:off x="1243478" y="663899"/>
             <a:ext cx="236220" cy="48891"/>
           </a:xfrm>
           <a:prstGeom prst="rect">
@@ -3701,7 +4627,7 @@
         </p:nvSpPr>
         <p:spPr>
           <a:xfrm>
-            <a:off x="895355" y="776115"/>
+            <a:off x="904245" y="776115"/>
             <a:ext cx="236220" cy="48891"/>
           </a:xfrm>
           <a:prstGeom prst="rect">
@@ -3753,7 +4679,7 @@
         </p:nvSpPr>
         <p:spPr>
           <a:xfrm>
-            <a:off x="3309625" y="773426"/>
+            <a:off x="3345827" y="778191"/>
             <a:ext cx="236220" cy="90486"/>
           </a:xfrm>
           <a:prstGeom prst="rect">
@@ -3805,8 +4731,8 @@
         </p:nvSpPr>
         <p:spPr>
           <a:xfrm>
-            <a:off x="3595045" y="787389"/>
-            <a:ext cx="236220" cy="83191"/>
+            <a:off x="3632028" y="787389"/>
+            <a:ext cx="188753" cy="83191"/>
           </a:xfrm>
           <a:prstGeom prst="rect">
             <a:avLst/>
@@ -3857,7 +4783,7 @@
         </p:nvSpPr>
         <p:spPr>
           <a:xfrm>
-            <a:off x="3614095" y="669273"/>
+            <a:off x="3631875" y="669273"/>
             <a:ext cx="236220" cy="83191"/>
           </a:xfrm>
           <a:prstGeom prst="rect">
@@ -4117,7 +5043,7 @@
         </p:nvSpPr>
         <p:spPr>
           <a:xfrm>
-            <a:off x="8597575" y="672147"/>
+            <a:off x="8579795" y="673069"/>
             <a:ext cx="236220" cy="83191"/>
           </a:xfrm>
           <a:prstGeom prst="rect">
@@ -4169,8 +5095,8 @@
         </p:nvSpPr>
         <p:spPr>
           <a:xfrm>
-            <a:off x="8549489" y="780712"/>
-            <a:ext cx="236220" cy="83191"/>
+            <a:off x="8501867" y="786108"/>
+            <a:ext cx="236220" cy="83190"/>
           </a:xfrm>
           <a:prstGeom prst="rect">
             <a:avLst/>
@@ -4221,7 +5147,7 @@
         </p:nvSpPr>
         <p:spPr>
           <a:xfrm>
-            <a:off x="8263116" y="780712"/>
+            <a:off x="8216447" y="786108"/>
             <a:ext cx="236220" cy="83191"/>
           </a:xfrm>
           <a:prstGeom prst="rect">
@@ -4273,7 +5199,7 @@
         </p:nvSpPr>
         <p:spPr>
           <a:xfrm>
-            <a:off x="10631336" y="786108"/>
+            <a:off x="10613556" y="784516"/>
             <a:ext cx="236220" cy="83191"/>
           </a:xfrm>
           <a:prstGeom prst="rect">
@@ -4415,42 +5341,6 @@
           </a:p>
         </p:txBody>
       </p:sp>
-      <p:pic>
-        <p:nvPicPr>
-          <p:cNvPr id="49" name="Picture 48">
-            <a:extLst>
-              <a:ext uri="{FF2B5EF4-FFF2-40B4-BE49-F238E27FC236}">
-                <a16:creationId xmlns:a16="http://schemas.microsoft.com/office/drawing/2014/main" id="{E5A99BE1-CC9E-5D1B-E3AC-F5EDFC732593}"/>
-              </a:ext>
-            </a:extLst>
-          </p:cNvPr>
-          <p:cNvPicPr>
-            <a:picLocks noChangeAspect="1"/>
-          </p:cNvPicPr>
-          <p:nvPr/>
-        </p:nvPicPr>
-        <p:blipFill>
-          <a:blip r:embed="rId3">
-            <a:extLst>
-              <a:ext uri="{28A0092B-C50C-407E-A947-70E740481C1C}">
-                <a14:useLocalDpi xmlns:a14="http://schemas.microsoft.com/office/drawing/2010/main" val="0"/>
-              </a:ext>
-            </a:extLst>
-          </a:blip>
-          <a:stretch>
-            <a:fillRect/>
-          </a:stretch>
-        </p:blipFill>
-        <p:spPr>
-          <a:xfrm>
-            <a:off x="0" y="3251200"/>
-            <a:ext cx="12192000" cy="3251200"/>
-          </a:xfrm>
-          <a:prstGeom prst="rect">
-            <a:avLst/>
-          </a:prstGeom>
-        </p:spPr>
-      </p:pic>
       <p:sp>
         <p:nvSpPr>
           <p:cNvPr id="51" name="Rectangle 50">
@@ -4465,7 +5355,7 @@
         </p:nvSpPr>
         <p:spPr>
           <a:xfrm>
-            <a:off x="6105835" y="662618"/>
+            <a:off x="6105835" y="664512"/>
             <a:ext cx="236220" cy="83191"/>
           </a:xfrm>
           <a:prstGeom prst="rect">
@@ -4517,7 +5407,7 @@
         </p:nvSpPr>
         <p:spPr>
           <a:xfrm>
-            <a:off x="10917709" y="784516"/>
+            <a:off x="10897706" y="784516"/>
             <a:ext cx="236220" cy="83191"/>
           </a:xfrm>
           <a:prstGeom prst="rect">
@@ -4569,7 +5459,7 @@
         </p:nvSpPr>
         <p:spPr>
           <a:xfrm>
-            <a:off x="1182673" y="776581"/>
+            <a:off x="1192833" y="776581"/>
             <a:ext cx="236220" cy="48891"/>
           </a:xfrm>
           <a:prstGeom prst="rect">
@@ -4607,6 +5497,42 @@
           </a:p>
         </p:txBody>
       </p:sp>
+      <p:pic>
+        <p:nvPicPr>
+          <p:cNvPr id="2" name="Picture 1">
+            <a:extLst>
+              <a:ext uri="{FF2B5EF4-FFF2-40B4-BE49-F238E27FC236}">
+                <a16:creationId xmlns:a16="http://schemas.microsoft.com/office/drawing/2014/main" id="{F70114E5-389A-8E5A-6AAF-ADE9E179AF67}"/>
+              </a:ext>
+            </a:extLst>
+          </p:cNvPr>
+          <p:cNvPicPr>
+            <a:picLocks noChangeAspect="1"/>
+          </p:cNvPicPr>
+          <p:nvPr/>
+        </p:nvPicPr>
+        <p:blipFill>
+          <a:blip r:embed="rId4">
+            <a:extLst>
+              <a:ext uri="{28A0092B-C50C-407E-A947-70E740481C1C}">
+                <a14:useLocalDpi xmlns:a14="http://schemas.microsoft.com/office/drawing/2010/main" val="0"/>
+              </a:ext>
+            </a:extLst>
+          </a:blip>
+          <a:stretch>
+            <a:fillRect/>
+          </a:stretch>
+        </p:blipFill>
+        <p:spPr>
+          <a:xfrm>
+            <a:off x="0" y="3251200"/>
+            <a:ext cx="12192000" cy="3251200"/>
+          </a:xfrm>
+          <a:prstGeom prst="rect">
+            <a:avLst/>
+          </a:prstGeom>
+        </p:spPr>
+      </p:pic>
     </p:spTree>
     <p:extLst>
       <p:ext uri="{BB962C8B-B14F-4D97-AF65-F5344CB8AC3E}">
@@ -4645,10 +5571,10 @@
       </p:grpSpPr>
       <p:pic>
         <p:nvPicPr>
-          <p:cNvPr id="58" name="Picture 57">
-            <a:extLst>
-              <a:ext uri="{FF2B5EF4-FFF2-40B4-BE49-F238E27FC236}">
-                <a16:creationId xmlns:a16="http://schemas.microsoft.com/office/drawing/2014/main" id="{371FC2AC-04FD-A68C-F9EC-A9E2B640F846}"/>
+          <p:cNvPr id="4" name="Picture 3">
+            <a:extLst>
+              <a:ext uri="{FF2B5EF4-FFF2-40B4-BE49-F238E27FC236}">
+                <a16:creationId xmlns:a16="http://schemas.microsoft.com/office/drawing/2014/main" id="{7CDF5EDF-110B-65D5-A445-BE679A0F2661}"/>
               </a:ext>
             </a:extLst>
           </p:cNvPr>
@@ -4658,27 +5584,139 @@
           <p:nvPr/>
         </p:nvPicPr>
         <p:blipFill>
-          <a:blip r:embed="rId2">
-            <a:extLst>
-              <a:ext uri="{28A0092B-C50C-407E-A947-70E740481C1C}">
-                <a14:useLocalDpi xmlns:a14="http://schemas.microsoft.com/office/drawing/2010/main" val="0"/>
-              </a:ext>
-            </a:extLst>
-          </a:blip>
+          <a:blip r:embed="rId2"/>
           <a:stretch>
             <a:fillRect/>
           </a:stretch>
         </p:blipFill>
         <p:spPr>
           <a:xfrm>
-            <a:off x="953" y="0"/>
-            <a:ext cx="12192000" cy="3251200"/>
+            <a:off x="9835" y="2032"/>
+            <a:ext cx="12192000" cy="3249168"/>
           </a:xfrm>
           <a:prstGeom prst="rect">
             <a:avLst/>
           </a:prstGeom>
         </p:spPr>
       </p:pic>
+      <p:sp>
+        <p:nvSpPr>
+          <p:cNvPr id="55" name="TextBox 54">
+            <a:extLst>
+              <a:ext uri="{FF2B5EF4-FFF2-40B4-BE49-F238E27FC236}">
+                <a16:creationId xmlns:a16="http://schemas.microsoft.com/office/drawing/2014/main" id="{54FE9F9D-1305-4E89-A251-D40147C3FFF0}"/>
+              </a:ext>
+            </a:extLst>
+          </p:cNvPr>
+          <p:cNvSpPr txBox="1"/>
+          <p:nvPr/>
+        </p:nvSpPr>
+        <p:spPr>
+          <a:xfrm>
+            <a:off x="10575751" y="699080"/>
+            <a:ext cx="350219" cy="338554"/>
+          </a:xfrm>
+          <a:prstGeom prst="rect">
+            <a:avLst/>
+          </a:prstGeom>
+          <a:noFill/>
+        </p:spPr>
+        <p:txBody>
+          <a:bodyPr wrap="square" rtlCol="0">
+            <a:spAutoFit/>
+          </a:bodyPr>
+          <a:lstStyle/>
+          <a:p>
+            <a:r>
+              <a:rPr lang="en-US" sz="1600" dirty="0">
+                <a:latin typeface="Arial" panose="020B0604020202020204" pitchFamily="34" charset="0"/>
+                <a:cs typeface="Arial" panose="020B0604020202020204" pitchFamily="34" charset="0"/>
+              </a:rPr>
+              <a:t>*</a:t>
+            </a:r>
+          </a:p>
+        </p:txBody>
+      </p:sp>
+      <p:sp>
+        <p:nvSpPr>
+          <p:cNvPr id="23" name="TextBox 22">
+            <a:extLst>
+              <a:ext uri="{FF2B5EF4-FFF2-40B4-BE49-F238E27FC236}">
+                <a16:creationId xmlns:a16="http://schemas.microsoft.com/office/drawing/2014/main" id="{0F8ADCFE-9200-FCA0-0BAA-1B0ADBA8DE64}"/>
+              </a:ext>
+            </a:extLst>
+          </p:cNvPr>
+          <p:cNvSpPr txBox="1"/>
+          <p:nvPr/>
+        </p:nvSpPr>
+        <p:spPr>
+          <a:xfrm>
+            <a:off x="3258674" y="706754"/>
+            <a:ext cx="350219" cy="230832"/>
+          </a:xfrm>
+          <a:prstGeom prst="rect">
+            <a:avLst/>
+          </a:prstGeom>
+          <a:noFill/>
+        </p:spPr>
+        <p:txBody>
+          <a:bodyPr wrap="square" rtlCol="0">
+            <a:spAutoFit/>
+          </a:bodyPr>
+          <a:lstStyle/>
+          <a:p>
+            <a:r>
+              <a:rPr lang="en-US" sz="900" dirty="0">
+                <a:latin typeface="Arial" panose="020B0604020202020204" pitchFamily="34" charset="0"/>
+                <a:cs typeface="Arial" panose="020B0604020202020204" pitchFamily="34" charset="0"/>
+              </a:rPr>
+              <a:t>ns</a:t>
+            </a:r>
+            <a:endParaRPr lang="en-US" sz="1600" dirty="0">
+              <a:latin typeface="Arial" panose="020B0604020202020204" pitchFamily="34" charset="0"/>
+              <a:cs typeface="Arial" panose="020B0604020202020204" pitchFamily="34" charset="0"/>
+            </a:endParaRPr>
+          </a:p>
+        </p:txBody>
+      </p:sp>
+      <p:sp>
+        <p:nvSpPr>
+          <p:cNvPr id="52" name="TextBox 51">
+            <a:extLst>
+              <a:ext uri="{FF2B5EF4-FFF2-40B4-BE49-F238E27FC236}">
+                <a16:creationId xmlns:a16="http://schemas.microsoft.com/office/drawing/2014/main" id="{70150D60-4F54-151F-75FE-769880A3F36A}"/>
+              </a:ext>
+            </a:extLst>
+          </p:cNvPr>
+          <p:cNvSpPr txBox="1"/>
+          <p:nvPr/>
+        </p:nvSpPr>
+        <p:spPr>
+          <a:xfrm>
+            <a:off x="8197124" y="699080"/>
+            <a:ext cx="350219" cy="230832"/>
+          </a:xfrm>
+          <a:prstGeom prst="rect">
+            <a:avLst/>
+          </a:prstGeom>
+          <a:noFill/>
+        </p:spPr>
+        <p:txBody>
+          <a:bodyPr wrap="square" rtlCol="0">
+            <a:spAutoFit/>
+          </a:bodyPr>
+          <a:lstStyle/>
+          <a:p>
+            <a:r>
+              <a:rPr lang="en-US" sz="900" dirty="0">
+                <a:latin typeface="Arial" panose="020B0604020202020204" pitchFamily="34" charset="0"/>
+                <a:cs typeface="Arial" panose="020B0604020202020204" pitchFamily="34" charset="0"/>
+              </a:rPr>
+              <a:t>ns</a:t>
+            </a:r>
+          </a:p>
+        </p:txBody>
+      </p:sp>
       <p:sp>
         <p:nvSpPr>
           <p:cNvPr id="59" name="Rectangle 58">
@@ -4789,10 +5827,10 @@
       </p:sp>
       <p:sp>
         <p:nvSpPr>
-          <p:cNvPr id="61" name="Rectangle 60">
-            <a:extLst>
-              <a:ext uri="{FF2B5EF4-FFF2-40B4-BE49-F238E27FC236}">
-                <a16:creationId xmlns:a16="http://schemas.microsoft.com/office/drawing/2014/main" id="{A61839B7-DAFE-3861-2915-FF3BBFE882EE}"/>
+          <p:cNvPr id="62" name="Rectangle 61">
+            <a:extLst>
+              <a:ext uri="{FF2B5EF4-FFF2-40B4-BE49-F238E27FC236}">
+                <a16:creationId xmlns:a16="http://schemas.microsoft.com/office/drawing/2014/main" id="{D3E276D7-2E44-D3F1-E358-1E0AE7FEF2BA}"/>
               </a:ext>
             </a:extLst>
           </p:cNvPr>
@@ -4801,7 +5839,7 @@
         </p:nvSpPr>
         <p:spPr>
           <a:xfrm>
-            <a:off x="1187125" y="663899"/>
+            <a:off x="1345245" y="937896"/>
             <a:ext cx="236220" cy="48891"/>
           </a:xfrm>
           <a:prstGeom prst="rect">
@@ -4811,7 +5849,9 @@
             <a:schemeClr val="bg1"/>
           </a:solidFill>
           <a:ln>
-            <a:noFill/>
+            <a:solidFill>
+              <a:schemeClr val="bg1"/>
+            </a:solidFill>
           </a:ln>
         </p:spPr>
         <p:style>
@@ -4841,10 +5881,10 @@
       </p:sp>
       <p:sp>
         <p:nvSpPr>
-          <p:cNvPr id="62" name="Rectangle 61">
-            <a:extLst>
-              <a:ext uri="{FF2B5EF4-FFF2-40B4-BE49-F238E27FC236}">
-                <a16:creationId xmlns:a16="http://schemas.microsoft.com/office/drawing/2014/main" id="{D3E276D7-2E44-D3F1-E358-1E0AE7FEF2BA}"/>
+          <p:cNvPr id="63" name="Rectangle 62">
+            <a:extLst>
+              <a:ext uri="{FF2B5EF4-FFF2-40B4-BE49-F238E27FC236}">
+                <a16:creationId xmlns:a16="http://schemas.microsoft.com/office/drawing/2014/main" id="{1A292209-6B4B-4740-DC54-0C226591549B}"/>
               </a:ext>
             </a:extLst>
           </p:cNvPr>
@@ -4853,7 +5893,7 @@
         </p:nvSpPr>
         <p:spPr>
           <a:xfrm>
-            <a:off x="1345245" y="937896"/>
+            <a:off x="895355" y="776115"/>
             <a:ext cx="236220" cy="48891"/>
           </a:xfrm>
           <a:prstGeom prst="rect">
@@ -4863,9 +5903,7 @@
             <a:schemeClr val="bg1"/>
           </a:solidFill>
           <a:ln>
-            <a:solidFill>
-              <a:schemeClr val="bg1"/>
-            </a:solidFill>
+            <a:noFill/>
           </a:ln>
         </p:spPr>
         <p:style>
@@ -4895,10 +5933,10 @@
       </p:sp>
       <p:sp>
         <p:nvSpPr>
-          <p:cNvPr id="63" name="Rectangle 62">
-            <a:extLst>
-              <a:ext uri="{FF2B5EF4-FFF2-40B4-BE49-F238E27FC236}">
-                <a16:creationId xmlns:a16="http://schemas.microsoft.com/office/drawing/2014/main" id="{1A292209-6B4B-4740-DC54-0C226591549B}"/>
+          <p:cNvPr id="67" name="Rectangle 66">
+            <a:extLst>
+              <a:ext uri="{FF2B5EF4-FFF2-40B4-BE49-F238E27FC236}">
+                <a16:creationId xmlns:a16="http://schemas.microsoft.com/office/drawing/2014/main" id="{D7152089-E7DB-A6F4-5DCB-FD71F483480C}"/>
               </a:ext>
             </a:extLst>
           </p:cNvPr>
@@ -4907,8 +5945,8 @@
         </p:nvSpPr>
         <p:spPr>
           <a:xfrm>
-            <a:off x="895355" y="776115"/>
-            <a:ext cx="236220" cy="48891"/>
+            <a:off x="3780378" y="564524"/>
+            <a:ext cx="236220" cy="83191"/>
           </a:xfrm>
           <a:prstGeom prst="rect">
             <a:avLst/>
@@ -4941,16 +5979,16 @@
           <a:lstStyle/>
           <a:p>
             <a:pPr algn="ctr"/>
-            <a:endParaRPr lang="en-US"/>
-          </a:p>
-        </p:txBody>
-      </p:sp>
-      <p:sp>
-        <p:nvSpPr>
-          <p:cNvPr id="64" name="Rectangle 63">
-            <a:extLst>
-              <a:ext uri="{FF2B5EF4-FFF2-40B4-BE49-F238E27FC236}">
-                <a16:creationId xmlns:a16="http://schemas.microsoft.com/office/drawing/2014/main" id="{20612AAA-99CF-BD36-5718-6E0731D206FD}"/>
+            <a:endParaRPr lang="en-US" dirty="0"/>
+          </a:p>
+        </p:txBody>
+      </p:sp>
+      <p:sp>
+        <p:nvSpPr>
+          <p:cNvPr id="68" name="Rectangle 67">
+            <a:extLst>
+              <a:ext uri="{FF2B5EF4-FFF2-40B4-BE49-F238E27FC236}">
+                <a16:creationId xmlns:a16="http://schemas.microsoft.com/office/drawing/2014/main" id="{94255076-CF74-6401-0CF4-5E8643BE3E5F}"/>
               </a:ext>
             </a:extLst>
           </p:cNvPr>
@@ -4959,8 +5997,8 @@
         </p:nvSpPr>
         <p:spPr>
           <a:xfrm>
-            <a:off x="3309625" y="773426"/>
-            <a:ext cx="236220" cy="90486"/>
+            <a:off x="6216325" y="528327"/>
+            <a:ext cx="236220" cy="83191"/>
           </a:xfrm>
           <a:prstGeom prst="rect">
             <a:avLst/>
@@ -4999,10 +6037,10 @@
       </p:sp>
       <p:sp>
         <p:nvSpPr>
-          <p:cNvPr id="65" name="Rectangle 64">
-            <a:extLst>
-              <a:ext uri="{FF2B5EF4-FFF2-40B4-BE49-F238E27FC236}">
-                <a16:creationId xmlns:a16="http://schemas.microsoft.com/office/drawing/2014/main" id="{4BAA1A3C-7515-2661-A919-8C2E361DA147}"/>
+          <p:cNvPr id="69" name="Rectangle 68">
+            <a:extLst>
+              <a:ext uri="{FF2B5EF4-FFF2-40B4-BE49-F238E27FC236}">
+                <a16:creationId xmlns:a16="http://schemas.microsoft.com/office/drawing/2014/main" id="{085D7161-A49F-BC03-D7FD-5242B6298DE3}"/>
               </a:ext>
             </a:extLst>
           </p:cNvPr>
@@ -5011,7 +6049,7 @@
         </p:nvSpPr>
         <p:spPr>
           <a:xfrm>
-            <a:off x="3595045" y="787389"/>
+            <a:off x="6216325" y="490847"/>
             <a:ext cx="236220" cy="83191"/>
           </a:xfrm>
           <a:prstGeom prst="rect">
@@ -5051,10 +6089,10 @@
       </p:sp>
       <p:sp>
         <p:nvSpPr>
-          <p:cNvPr id="66" name="Rectangle 65">
-            <a:extLst>
-              <a:ext uri="{FF2B5EF4-FFF2-40B4-BE49-F238E27FC236}">
-                <a16:creationId xmlns:a16="http://schemas.microsoft.com/office/drawing/2014/main" id="{338D48C9-DB93-4220-0181-41594BE35CD1}"/>
+          <p:cNvPr id="70" name="Rectangle 69">
+            <a:extLst>
+              <a:ext uri="{FF2B5EF4-FFF2-40B4-BE49-F238E27FC236}">
+                <a16:creationId xmlns:a16="http://schemas.microsoft.com/office/drawing/2014/main" id="{0DA6E816-8AB4-87CD-6EDF-A4F9A4F42D0C}"/>
               </a:ext>
             </a:extLst>
           </p:cNvPr>
@@ -5063,7 +6101,7 @@
         </p:nvSpPr>
         <p:spPr>
           <a:xfrm>
-            <a:off x="3614095" y="669273"/>
+            <a:off x="8760309" y="532442"/>
             <a:ext cx="236220" cy="83191"/>
           </a:xfrm>
           <a:prstGeom prst="rect">
@@ -5103,10 +6141,10 @@
       </p:sp>
       <p:sp>
         <p:nvSpPr>
-          <p:cNvPr id="67" name="Rectangle 66">
-            <a:extLst>
-              <a:ext uri="{FF2B5EF4-FFF2-40B4-BE49-F238E27FC236}">
-                <a16:creationId xmlns:a16="http://schemas.microsoft.com/office/drawing/2014/main" id="{D7152089-E7DB-A6F4-5DCB-FD71F483480C}"/>
+          <p:cNvPr id="75" name="Rectangle 74">
+            <a:extLst>
+              <a:ext uri="{FF2B5EF4-FFF2-40B4-BE49-F238E27FC236}">
+                <a16:creationId xmlns:a16="http://schemas.microsoft.com/office/drawing/2014/main" id="{B1089D7F-51F7-DA88-83DC-3140A2D1E242}"/>
               </a:ext>
             </a:extLst>
           </p:cNvPr>
@@ -5115,7 +6153,7 @@
         </p:nvSpPr>
         <p:spPr>
           <a:xfrm>
-            <a:off x="3780378" y="564524"/>
+            <a:off x="10934549" y="662603"/>
             <a:ext cx="236220" cy="83191"/>
           </a:xfrm>
           <a:prstGeom prst="rect">
@@ -5155,10 +6193,10 @@
       </p:sp>
       <p:sp>
         <p:nvSpPr>
-          <p:cNvPr id="68" name="Rectangle 67">
-            <a:extLst>
-              <a:ext uri="{FF2B5EF4-FFF2-40B4-BE49-F238E27FC236}">
-                <a16:creationId xmlns:a16="http://schemas.microsoft.com/office/drawing/2014/main" id="{94255076-CF74-6401-0CF4-5E8643BE3E5F}"/>
+          <p:cNvPr id="76" name="Rectangle 75">
+            <a:extLst>
+              <a:ext uri="{FF2B5EF4-FFF2-40B4-BE49-F238E27FC236}">
+                <a16:creationId xmlns:a16="http://schemas.microsoft.com/office/drawing/2014/main" id="{D6BE2682-94A1-D7F8-ABFE-31DFB64C4AB4}"/>
               </a:ext>
             </a:extLst>
           </p:cNvPr>
@@ -5167,7 +6205,7 @@
         </p:nvSpPr>
         <p:spPr>
           <a:xfrm>
-            <a:off x="6216325" y="528327"/>
+            <a:off x="11088219" y="564525"/>
             <a:ext cx="236220" cy="83191"/>
           </a:xfrm>
           <a:prstGeom prst="rect">
@@ -5207,10 +6245,10 @@
       </p:sp>
       <p:sp>
         <p:nvSpPr>
-          <p:cNvPr id="69" name="Rectangle 68">
-            <a:extLst>
-              <a:ext uri="{FF2B5EF4-FFF2-40B4-BE49-F238E27FC236}">
-                <a16:creationId xmlns:a16="http://schemas.microsoft.com/office/drawing/2014/main" id="{085D7161-A49F-BC03-D7FD-5242B6298DE3}"/>
+          <p:cNvPr id="29" name="Rectangle 28">
+            <a:extLst>
+              <a:ext uri="{FF2B5EF4-FFF2-40B4-BE49-F238E27FC236}">
+                <a16:creationId xmlns:a16="http://schemas.microsoft.com/office/drawing/2014/main" id="{5EF699FE-A98E-C61B-B02D-D7179D623E81}"/>
               </a:ext>
             </a:extLst>
           </p:cNvPr>
@@ -5219,8 +6257,8 @@
         </p:nvSpPr>
         <p:spPr>
           <a:xfrm>
-            <a:off x="6216325" y="490847"/>
-            <a:ext cx="236220" cy="83191"/>
+            <a:off x="1399540" y="472438"/>
+            <a:ext cx="236220" cy="101600"/>
           </a:xfrm>
           <a:prstGeom prst="rect">
             <a:avLst/>
@@ -5229,7 +6267,9 @@
             <a:schemeClr val="bg1"/>
           </a:solidFill>
           <a:ln>
-            <a:noFill/>
+            <a:solidFill>
+              <a:schemeClr val="bg1"/>
+            </a:solidFill>
           </a:ln>
         </p:spPr>
         <p:style>
@@ -5253,16 +6293,16 @@
           <a:lstStyle/>
           <a:p>
             <a:pPr algn="ctr"/>
-            <a:endParaRPr lang="en-US" dirty="0"/>
-          </a:p>
-        </p:txBody>
-      </p:sp>
-      <p:sp>
-        <p:nvSpPr>
-          <p:cNvPr id="70" name="Rectangle 69">
-            <a:extLst>
-              <a:ext uri="{FF2B5EF4-FFF2-40B4-BE49-F238E27FC236}">
-                <a16:creationId xmlns:a16="http://schemas.microsoft.com/office/drawing/2014/main" id="{0DA6E816-8AB4-87CD-6EDF-A4F9A4F42D0C}"/>
+            <a:endParaRPr lang="en-US"/>
+          </a:p>
+        </p:txBody>
+      </p:sp>
+      <p:sp>
+        <p:nvSpPr>
+          <p:cNvPr id="32" name="Rectangle 31">
+            <a:extLst>
+              <a:ext uri="{FF2B5EF4-FFF2-40B4-BE49-F238E27FC236}">
+                <a16:creationId xmlns:a16="http://schemas.microsoft.com/office/drawing/2014/main" id="{1A8DAC18-468A-1381-C1CA-6BCFFB126FEB}"/>
               </a:ext>
             </a:extLst>
           </p:cNvPr>
@@ -5271,8 +6311,8 @@
         </p:nvSpPr>
         <p:spPr>
           <a:xfrm>
-            <a:off x="8760309" y="532442"/>
-            <a:ext cx="236220" cy="83191"/>
+            <a:off x="1345245" y="937896"/>
+            <a:ext cx="236220" cy="48891"/>
           </a:xfrm>
           <a:prstGeom prst="rect">
             <a:avLst/>
@@ -5281,7 +6321,9 @@
             <a:schemeClr val="bg1"/>
           </a:solidFill>
           <a:ln>
-            <a:noFill/>
+            <a:solidFill>
+              <a:schemeClr val="bg1"/>
+            </a:solidFill>
           </a:ln>
         </p:spPr>
         <p:style>
@@ -5305,16 +6347,16 @@
           <a:lstStyle/>
           <a:p>
             <a:pPr algn="ctr"/>
-            <a:endParaRPr lang="en-US" dirty="0"/>
-          </a:p>
-        </p:txBody>
-      </p:sp>
-      <p:sp>
-        <p:nvSpPr>
-          <p:cNvPr id="71" name="Rectangle 70">
-            <a:extLst>
-              <a:ext uri="{FF2B5EF4-FFF2-40B4-BE49-F238E27FC236}">
-                <a16:creationId xmlns:a16="http://schemas.microsoft.com/office/drawing/2014/main" id="{474013FA-5654-716D-30BA-FCC43AFA5D3F}"/>
+            <a:endParaRPr lang="en-US"/>
+          </a:p>
+        </p:txBody>
+      </p:sp>
+      <p:sp>
+        <p:nvSpPr>
+          <p:cNvPr id="37" name="Rectangle 36">
+            <a:extLst>
+              <a:ext uri="{FF2B5EF4-FFF2-40B4-BE49-F238E27FC236}">
+                <a16:creationId xmlns:a16="http://schemas.microsoft.com/office/drawing/2014/main" id="{735B2D46-0688-2B32-0E8F-A683233F3160}"/>
               </a:ext>
             </a:extLst>
           </p:cNvPr>
@@ -5323,7 +6365,7 @@
         </p:nvSpPr>
         <p:spPr>
           <a:xfrm>
-            <a:off x="8597575" y="672147"/>
+            <a:off x="3770305" y="522930"/>
             <a:ext cx="236220" cy="83191"/>
           </a:xfrm>
           <a:prstGeom prst="rect">
@@ -5363,10 +6405,10 @@
       </p:sp>
       <p:sp>
         <p:nvSpPr>
-          <p:cNvPr id="72" name="Rectangle 71">
-            <a:extLst>
-              <a:ext uri="{FF2B5EF4-FFF2-40B4-BE49-F238E27FC236}">
-                <a16:creationId xmlns:a16="http://schemas.microsoft.com/office/drawing/2014/main" id="{9D4138A3-4CD4-5847-2AFF-8D2A8400F412}"/>
+          <p:cNvPr id="39" name="Rectangle 38">
+            <a:extLst>
+              <a:ext uri="{FF2B5EF4-FFF2-40B4-BE49-F238E27FC236}">
+                <a16:creationId xmlns:a16="http://schemas.microsoft.com/office/drawing/2014/main" id="{CC1575CF-77B6-8E6B-5687-41DC7F9C8FA6}"/>
               </a:ext>
             </a:extLst>
           </p:cNvPr>
@@ -5375,7 +6417,7 @@
         </p:nvSpPr>
         <p:spPr>
           <a:xfrm>
-            <a:off x="8549489" y="780712"/>
+            <a:off x="6216325" y="490847"/>
             <a:ext cx="236220" cy="83191"/>
           </a:xfrm>
           <a:prstGeom prst="rect">
@@ -5415,10 +6457,10 @@
       </p:sp>
       <p:sp>
         <p:nvSpPr>
-          <p:cNvPr id="73" name="Rectangle 72">
-            <a:extLst>
-              <a:ext uri="{FF2B5EF4-FFF2-40B4-BE49-F238E27FC236}">
-                <a16:creationId xmlns:a16="http://schemas.microsoft.com/office/drawing/2014/main" id="{4E746768-9244-72F4-3DBD-754C96BF29CD}"/>
+          <p:cNvPr id="47" name="Rectangle 46">
+            <a:extLst>
+              <a:ext uri="{FF2B5EF4-FFF2-40B4-BE49-F238E27FC236}">
+                <a16:creationId xmlns:a16="http://schemas.microsoft.com/office/drawing/2014/main" id="{AA2BF28D-0F8C-32B4-B4A7-A8C77F0658D3}"/>
               </a:ext>
             </a:extLst>
           </p:cNvPr>
@@ -5427,7 +6469,7 @@
         </p:nvSpPr>
         <p:spPr>
           <a:xfrm>
-            <a:off x="8263116" y="780712"/>
+            <a:off x="11071062" y="490847"/>
             <a:ext cx="236220" cy="83191"/>
           </a:xfrm>
           <a:prstGeom prst="rect">
@@ -5467,322 +6509,466 @@
       </p:sp>
       <p:sp>
         <p:nvSpPr>
-          <p:cNvPr id="74" name="Rectangle 73">
-            <a:extLst>
-              <a:ext uri="{FF2B5EF4-FFF2-40B4-BE49-F238E27FC236}">
-                <a16:creationId xmlns:a16="http://schemas.microsoft.com/office/drawing/2014/main" id="{72427C7A-439F-E8D0-991A-1561E18528BE}"/>
-              </a:ext>
-            </a:extLst>
-          </p:cNvPr>
-          <p:cNvSpPr/>
+          <p:cNvPr id="6" name="TextBox 5">
+            <a:extLst>
+              <a:ext uri="{FF2B5EF4-FFF2-40B4-BE49-F238E27FC236}">
+                <a16:creationId xmlns:a16="http://schemas.microsoft.com/office/drawing/2014/main" id="{C2043A72-F85D-5049-D6DB-E38DFADDE366}"/>
+              </a:ext>
+            </a:extLst>
+          </p:cNvPr>
+          <p:cNvSpPr txBox="1"/>
           <p:nvPr/>
         </p:nvSpPr>
         <p:spPr>
           <a:xfrm>
-            <a:off x="10631336" y="786108"/>
-            <a:ext cx="236220" cy="83191"/>
+            <a:off x="816642" y="472438"/>
+            <a:ext cx="350219" cy="338554"/>
           </a:xfrm>
           <a:prstGeom prst="rect">
             <a:avLst/>
           </a:prstGeom>
-          <a:solidFill>
-            <a:schemeClr val="bg1"/>
-          </a:solidFill>
-          <a:ln>
-            <a:noFill/>
-          </a:ln>
-        </p:spPr>
-        <p:style>
-          <a:lnRef idx="2">
-            <a:schemeClr val="accent1">
-              <a:shade val="15000"/>
-            </a:schemeClr>
-          </a:lnRef>
-          <a:fillRef idx="1">
-            <a:schemeClr val="accent1"/>
-          </a:fillRef>
-          <a:effectRef idx="0">
-            <a:schemeClr val="accent1"/>
-          </a:effectRef>
-          <a:fontRef idx="minor">
-            <a:schemeClr val="lt1"/>
-          </a:fontRef>
-        </p:style>
-        <p:txBody>
-          <a:bodyPr rtlCol="0" anchor="ctr"/>
-          <a:lstStyle/>
-          <a:p>
-            <a:pPr algn="ctr"/>
-            <a:endParaRPr lang="en-US" dirty="0"/>
-          </a:p>
-        </p:txBody>
-      </p:sp>
-      <p:sp>
-        <p:nvSpPr>
-          <p:cNvPr id="75" name="Rectangle 74">
-            <a:extLst>
-              <a:ext uri="{FF2B5EF4-FFF2-40B4-BE49-F238E27FC236}">
-                <a16:creationId xmlns:a16="http://schemas.microsoft.com/office/drawing/2014/main" id="{B1089D7F-51F7-DA88-83DC-3140A2D1E242}"/>
-              </a:ext>
-            </a:extLst>
-          </p:cNvPr>
-          <p:cNvSpPr/>
+          <a:noFill/>
+        </p:spPr>
+        <p:txBody>
+          <a:bodyPr wrap="square" rtlCol="0">
+            <a:spAutoFit/>
+          </a:bodyPr>
+          <a:lstStyle/>
+          <a:p>
+            <a:r>
+              <a:rPr lang="en-US" sz="1600" dirty="0">
+                <a:latin typeface="Arial" panose="020B0604020202020204" pitchFamily="34" charset="0"/>
+                <a:cs typeface="Arial" panose="020B0604020202020204" pitchFamily="34" charset="0"/>
+              </a:rPr>
+              <a:t>**</a:t>
+            </a:r>
+          </a:p>
+        </p:txBody>
+      </p:sp>
+      <p:sp>
+        <p:nvSpPr>
+          <p:cNvPr id="7" name="TextBox 6">
+            <a:extLst>
+              <a:ext uri="{FF2B5EF4-FFF2-40B4-BE49-F238E27FC236}">
+                <a16:creationId xmlns:a16="http://schemas.microsoft.com/office/drawing/2014/main" id="{D1AFBB3C-EAD1-E796-1763-59A3C5675D59}"/>
+              </a:ext>
+            </a:extLst>
+          </p:cNvPr>
+          <p:cNvSpPr txBox="1"/>
           <p:nvPr/>
         </p:nvSpPr>
         <p:spPr>
           <a:xfrm>
-            <a:off x="10934549" y="662603"/>
-            <a:ext cx="236220" cy="83191"/>
+            <a:off x="816642" y="582166"/>
+            <a:ext cx="350219" cy="338554"/>
           </a:xfrm>
           <a:prstGeom prst="rect">
             <a:avLst/>
           </a:prstGeom>
-          <a:solidFill>
-            <a:schemeClr val="bg1"/>
-          </a:solidFill>
-          <a:ln>
-            <a:noFill/>
-          </a:ln>
-        </p:spPr>
-        <p:style>
-          <a:lnRef idx="2">
-            <a:schemeClr val="accent1">
-              <a:shade val="15000"/>
-            </a:schemeClr>
-          </a:lnRef>
-          <a:fillRef idx="1">
-            <a:schemeClr val="accent1"/>
-          </a:fillRef>
-          <a:effectRef idx="0">
-            <a:schemeClr val="accent1"/>
-          </a:effectRef>
-          <a:fontRef idx="minor">
-            <a:schemeClr val="lt1"/>
-          </a:fontRef>
-        </p:style>
-        <p:txBody>
-          <a:bodyPr rtlCol="0" anchor="ctr"/>
-          <a:lstStyle/>
-          <a:p>
-            <a:pPr algn="ctr"/>
-            <a:endParaRPr lang="en-US" dirty="0"/>
-          </a:p>
-        </p:txBody>
-      </p:sp>
-      <p:sp>
-        <p:nvSpPr>
-          <p:cNvPr id="76" name="Rectangle 75">
-            <a:extLst>
-              <a:ext uri="{FF2B5EF4-FFF2-40B4-BE49-F238E27FC236}">
-                <a16:creationId xmlns:a16="http://schemas.microsoft.com/office/drawing/2014/main" id="{D6BE2682-94A1-D7F8-ABFE-31DFB64C4AB4}"/>
-              </a:ext>
-            </a:extLst>
-          </p:cNvPr>
-          <p:cNvSpPr/>
+          <a:noFill/>
+        </p:spPr>
+        <p:txBody>
+          <a:bodyPr wrap="square" rtlCol="0">
+            <a:spAutoFit/>
+          </a:bodyPr>
+          <a:lstStyle/>
+          <a:p>
+            <a:r>
+              <a:rPr lang="en-US" sz="1600" dirty="0">
+                <a:latin typeface="Arial" panose="020B0604020202020204" pitchFamily="34" charset="0"/>
+                <a:cs typeface="Arial" panose="020B0604020202020204" pitchFamily="34" charset="0"/>
+              </a:rPr>
+              <a:t>*</a:t>
+            </a:r>
+          </a:p>
+        </p:txBody>
+      </p:sp>
+      <p:sp>
+        <p:nvSpPr>
+          <p:cNvPr id="8" name="TextBox 7">
+            <a:extLst>
+              <a:ext uri="{FF2B5EF4-FFF2-40B4-BE49-F238E27FC236}">
+                <a16:creationId xmlns:a16="http://schemas.microsoft.com/office/drawing/2014/main" id="{C65BD7AA-C0BD-1D08-BF5F-FCFB202FCA42}"/>
+              </a:ext>
+            </a:extLst>
+          </p:cNvPr>
+          <p:cNvSpPr txBox="1"/>
           <p:nvPr/>
         </p:nvSpPr>
         <p:spPr>
           <a:xfrm>
-            <a:off x="11088219" y="564525"/>
-            <a:ext cx="236220" cy="83191"/>
+            <a:off x="819218" y="701038"/>
+            <a:ext cx="350219" cy="338554"/>
           </a:xfrm>
           <a:prstGeom prst="rect">
             <a:avLst/>
           </a:prstGeom>
-          <a:solidFill>
-            <a:schemeClr val="bg1"/>
-          </a:solidFill>
-          <a:ln>
-            <a:noFill/>
-          </a:ln>
-        </p:spPr>
-        <p:style>
-          <a:lnRef idx="2">
-            <a:schemeClr val="accent1">
-              <a:shade val="15000"/>
-            </a:schemeClr>
-          </a:lnRef>
-          <a:fillRef idx="1">
-            <a:schemeClr val="accent1"/>
-          </a:fillRef>
-          <a:effectRef idx="0">
-            <a:schemeClr val="accent1"/>
-          </a:effectRef>
-          <a:fontRef idx="minor">
-            <a:schemeClr val="lt1"/>
-          </a:fontRef>
-        </p:style>
-        <p:txBody>
-          <a:bodyPr rtlCol="0" anchor="ctr"/>
-          <a:lstStyle/>
-          <a:p>
-            <a:pPr algn="ctr"/>
-            <a:endParaRPr lang="en-US" dirty="0"/>
-          </a:p>
-        </p:txBody>
-      </p:sp>
-      <p:sp>
-        <p:nvSpPr>
-          <p:cNvPr id="77" name="Rectangle 76">
-            <a:extLst>
-              <a:ext uri="{FF2B5EF4-FFF2-40B4-BE49-F238E27FC236}">
-                <a16:creationId xmlns:a16="http://schemas.microsoft.com/office/drawing/2014/main" id="{BC5174A2-56C4-FDFA-402F-45C25102B037}"/>
-              </a:ext>
-            </a:extLst>
-          </p:cNvPr>
-          <p:cNvSpPr/>
+          <a:noFill/>
+        </p:spPr>
+        <p:txBody>
+          <a:bodyPr wrap="square" rtlCol="0">
+            <a:spAutoFit/>
+          </a:bodyPr>
+          <a:lstStyle/>
+          <a:p>
+            <a:r>
+              <a:rPr lang="en-US" sz="1600" dirty="0">
+                <a:latin typeface="Arial" panose="020B0604020202020204" pitchFamily="34" charset="0"/>
+                <a:cs typeface="Arial" panose="020B0604020202020204" pitchFamily="34" charset="0"/>
+              </a:rPr>
+              <a:t>**</a:t>
+            </a:r>
+          </a:p>
+        </p:txBody>
+      </p:sp>
+      <p:sp>
+        <p:nvSpPr>
+          <p:cNvPr id="21" name="TextBox 20">
+            <a:extLst>
+              <a:ext uri="{FF2B5EF4-FFF2-40B4-BE49-F238E27FC236}">
+                <a16:creationId xmlns:a16="http://schemas.microsoft.com/office/drawing/2014/main" id="{2A8EBED4-E2B9-EF7D-AD50-5E195C4F4742}"/>
+              </a:ext>
+            </a:extLst>
+          </p:cNvPr>
+          <p:cNvSpPr txBox="1"/>
           <p:nvPr/>
         </p:nvSpPr>
         <p:spPr>
           <a:xfrm>
-            <a:off x="6105835" y="662618"/>
-            <a:ext cx="236220" cy="83191"/>
+            <a:off x="3256098" y="478154"/>
+            <a:ext cx="350219" cy="230832"/>
           </a:xfrm>
           <a:prstGeom prst="rect">
             <a:avLst/>
           </a:prstGeom>
-          <a:solidFill>
-            <a:schemeClr val="bg1"/>
-          </a:solidFill>
-          <a:ln>
-            <a:noFill/>
-          </a:ln>
-        </p:spPr>
-        <p:style>
-          <a:lnRef idx="2">
-            <a:schemeClr val="accent1">
-              <a:shade val="15000"/>
-            </a:schemeClr>
-          </a:lnRef>
-          <a:fillRef idx="1">
-            <a:schemeClr val="accent1"/>
-          </a:fillRef>
-          <a:effectRef idx="0">
-            <a:schemeClr val="accent1"/>
-          </a:effectRef>
-          <a:fontRef idx="minor">
-            <a:schemeClr val="lt1"/>
-          </a:fontRef>
-        </p:style>
-        <p:txBody>
-          <a:bodyPr rtlCol="0" anchor="ctr"/>
-          <a:lstStyle/>
-          <a:p>
-            <a:pPr algn="ctr"/>
-            <a:endParaRPr lang="en-US" dirty="0"/>
-          </a:p>
-        </p:txBody>
-      </p:sp>
-      <p:sp>
-        <p:nvSpPr>
-          <p:cNvPr id="78" name="Rectangle 77">
-            <a:extLst>
-              <a:ext uri="{FF2B5EF4-FFF2-40B4-BE49-F238E27FC236}">
-                <a16:creationId xmlns:a16="http://schemas.microsoft.com/office/drawing/2014/main" id="{21165659-955E-9D88-01B4-CA894A15270A}"/>
-              </a:ext>
-            </a:extLst>
-          </p:cNvPr>
-          <p:cNvSpPr/>
+          <a:noFill/>
+        </p:spPr>
+        <p:txBody>
+          <a:bodyPr wrap="square" rtlCol="0">
+            <a:spAutoFit/>
+          </a:bodyPr>
+          <a:lstStyle/>
+          <a:p>
+            <a:r>
+              <a:rPr lang="en-US" sz="900" dirty="0">
+                <a:latin typeface="Arial" panose="020B0604020202020204" pitchFamily="34" charset="0"/>
+                <a:cs typeface="Arial" panose="020B0604020202020204" pitchFamily="34" charset="0"/>
+              </a:rPr>
+              <a:t>ns</a:t>
+            </a:r>
+          </a:p>
+        </p:txBody>
+      </p:sp>
+      <p:sp>
+        <p:nvSpPr>
+          <p:cNvPr id="22" name="TextBox 21">
+            <a:extLst>
+              <a:ext uri="{FF2B5EF4-FFF2-40B4-BE49-F238E27FC236}">
+                <a16:creationId xmlns:a16="http://schemas.microsoft.com/office/drawing/2014/main" id="{FA7BCB8F-BAF4-5812-0A70-C89C92EF441F}"/>
+              </a:ext>
+            </a:extLst>
+          </p:cNvPr>
+          <p:cNvSpPr txBox="1"/>
           <p:nvPr/>
         </p:nvSpPr>
         <p:spPr>
           <a:xfrm>
-            <a:off x="10917709" y="784516"/>
-            <a:ext cx="236220" cy="83191"/>
+            <a:off x="3256098" y="587882"/>
+            <a:ext cx="350219" cy="230832"/>
           </a:xfrm>
           <a:prstGeom prst="rect">
             <a:avLst/>
           </a:prstGeom>
-          <a:solidFill>
-            <a:schemeClr val="bg1"/>
-          </a:solidFill>
-          <a:ln>
-            <a:noFill/>
-          </a:ln>
-        </p:spPr>
-        <p:style>
-          <a:lnRef idx="2">
-            <a:schemeClr val="accent1">
-              <a:shade val="15000"/>
-            </a:schemeClr>
-          </a:lnRef>
-          <a:fillRef idx="1">
-            <a:schemeClr val="accent1"/>
-          </a:fillRef>
-          <a:effectRef idx="0">
-            <a:schemeClr val="accent1"/>
-          </a:effectRef>
-          <a:fontRef idx="minor">
-            <a:schemeClr val="lt1"/>
-          </a:fontRef>
-        </p:style>
-        <p:txBody>
-          <a:bodyPr rtlCol="0" anchor="ctr"/>
-          <a:lstStyle/>
-          <a:p>
-            <a:pPr algn="ctr"/>
-            <a:endParaRPr lang="en-US" dirty="0"/>
-          </a:p>
-        </p:txBody>
-      </p:sp>
-      <p:sp>
-        <p:nvSpPr>
-          <p:cNvPr id="79" name="Rectangle 78">
-            <a:extLst>
-              <a:ext uri="{FF2B5EF4-FFF2-40B4-BE49-F238E27FC236}">
-                <a16:creationId xmlns:a16="http://schemas.microsoft.com/office/drawing/2014/main" id="{37654A0D-9B9E-846C-D653-B4F27A932638}"/>
-              </a:ext>
-            </a:extLst>
-          </p:cNvPr>
-          <p:cNvSpPr/>
+          <a:noFill/>
+        </p:spPr>
+        <p:txBody>
+          <a:bodyPr wrap="square" rtlCol="0">
+            <a:spAutoFit/>
+          </a:bodyPr>
+          <a:lstStyle/>
+          <a:p>
+            <a:r>
+              <a:rPr lang="en-US" sz="900" dirty="0">
+                <a:latin typeface="Arial" panose="020B0604020202020204" pitchFamily="34" charset="0"/>
+                <a:cs typeface="Arial" panose="020B0604020202020204" pitchFamily="34" charset="0"/>
+              </a:rPr>
+              <a:t>ns</a:t>
+            </a:r>
+          </a:p>
+        </p:txBody>
+      </p:sp>
+      <p:sp>
+        <p:nvSpPr>
+          <p:cNvPr id="27" name="TextBox 26">
+            <a:extLst>
+              <a:ext uri="{FF2B5EF4-FFF2-40B4-BE49-F238E27FC236}">
+                <a16:creationId xmlns:a16="http://schemas.microsoft.com/office/drawing/2014/main" id="{B271E376-2E84-2F26-451F-3F73F2A690BE}"/>
+              </a:ext>
+            </a:extLst>
+          </p:cNvPr>
+          <p:cNvSpPr txBox="1"/>
           <p:nvPr/>
         </p:nvSpPr>
         <p:spPr>
           <a:xfrm>
-            <a:off x="1182673" y="776581"/>
-            <a:ext cx="236220" cy="48891"/>
+            <a:off x="5678279" y="472438"/>
+            <a:ext cx="350219" cy="338554"/>
           </a:xfrm>
           <a:prstGeom prst="rect">
             <a:avLst/>
           </a:prstGeom>
-          <a:solidFill>
-            <a:schemeClr val="bg1"/>
-          </a:solidFill>
-          <a:ln>
-            <a:noFill/>
-          </a:ln>
-        </p:spPr>
-        <p:style>
-          <a:lnRef idx="2">
-            <a:schemeClr val="accent1">
-              <a:shade val="15000"/>
-            </a:schemeClr>
-          </a:lnRef>
-          <a:fillRef idx="1">
-            <a:schemeClr val="accent1"/>
-          </a:fillRef>
-          <a:effectRef idx="0">
-            <a:schemeClr val="accent1"/>
-          </a:effectRef>
-          <a:fontRef idx="minor">
-            <a:schemeClr val="lt1"/>
-          </a:fontRef>
-        </p:style>
-        <p:txBody>
-          <a:bodyPr rtlCol="0" anchor="ctr"/>
-          <a:lstStyle/>
-          <a:p>
-            <a:pPr algn="ctr"/>
-            <a:endParaRPr lang="en-US"/>
+          <a:noFill/>
+        </p:spPr>
+        <p:txBody>
+          <a:bodyPr wrap="square" rtlCol="0">
+            <a:spAutoFit/>
+          </a:bodyPr>
+          <a:lstStyle/>
+          <a:p>
+            <a:r>
+              <a:rPr lang="en-US" sz="1600" dirty="0">
+                <a:latin typeface="Arial" panose="020B0604020202020204" pitchFamily="34" charset="0"/>
+                <a:cs typeface="Arial" panose="020B0604020202020204" pitchFamily="34" charset="0"/>
+              </a:rPr>
+              <a:t>**</a:t>
+            </a:r>
+          </a:p>
+        </p:txBody>
+      </p:sp>
+      <p:sp>
+        <p:nvSpPr>
+          <p:cNvPr id="48" name="TextBox 47">
+            <a:extLst>
+              <a:ext uri="{FF2B5EF4-FFF2-40B4-BE49-F238E27FC236}">
+                <a16:creationId xmlns:a16="http://schemas.microsoft.com/office/drawing/2014/main" id="{A4DF2C38-9AD8-F0AB-5B49-1B9514ABCC21}"/>
+              </a:ext>
+            </a:extLst>
+          </p:cNvPr>
+          <p:cNvSpPr txBox="1"/>
+          <p:nvPr/>
+        </p:nvSpPr>
+        <p:spPr>
+          <a:xfrm>
+            <a:off x="5678279" y="582166"/>
+            <a:ext cx="350219" cy="338554"/>
+          </a:xfrm>
+          <a:prstGeom prst="rect">
+            <a:avLst/>
+          </a:prstGeom>
+          <a:noFill/>
+        </p:spPr>
+        <p:txBody>
+          <a:bodyPr wrap="square" rtlCol="0">
+            <a:spAutoFit/>
+          </a:bodyPr>
+          <a:lstStyle/>
+          <a:p>
+            <a:r>
+              <a:rPr lang="en-US" sz="1600" dirty="0">
+                <a:latin typeface="Arial" panose="020B0604020202020204" pitchFamily="34" charset="0"/>
+                <a:cs typeface="Arial" panose="020B0604020202020204" pitchFamily="34" charset="0"/>
+              </a:rPr>
+              <a:t>**</a:t>
+            </a:r>
+          </a:p>
+        </p:txBody>
+      </p:sp>
+      <p:sp>
+        <p:nvSpPr>
+          <p:cNvPr id="49" name="TextBox 48">
+            <a:extLst>
+              <a:ext uri="{FF2B5EF4-FFF2-40B4-BE49-F238E27FC236}">
+                <a16:creationId xmlns:a16="http://schemas.microsoft.com/office/drawing/2014/main" id="{4DDF932E-70C4-3D79-679D-40A2237D5721}"/>
+              </a:ext>
+            </a:extLst>
+          </p:cNvPr>
+          <p:cNvSpPr txBox="1"/>
+          <p:nvPr/>
+        </p:nvSpPr>
+        <p:spPr>
+          <a:xfrm>
+            <a:off x="5680855" y="701038"/>
+            <a:ext cx="350219" cy="338554"/>
+          </a:xfrm>
+          <a:prstGeom prst="rect">
+            <a:avLst/>
+          </a:prstGeom>
+          <a:noFill/>
+        </p:spPr>
+        <p:txBody>
+          <a:bodyPr wrap="square" rtlCol="0">
+            <a:spAutoFit/>
+          </a:bodyPr>
+          <a:lstStyle/>
+          <a:p>
+            <a:r>
+              <a:rPr lang="en-US" sz="1600" dirty="0">
+                <a:latin typeface="Arial" panose="020B0604020202020204" pitchFamily="34" charset="0"/>
+                <a:cs typeface="Arial" panose="020B0604020202020204" pitchFamily="34" charset="0"/>
+              </a:rPr>
+              <a:t>**</a:t>
+            </a:r>
+          </a:p>
+        </p:txBody>
+      </p:sp>
+      <p:sp>
+        <p:nvSpPr>
+          <p:cNvPr id="50" name="TextBox 49">
+            <a:extLst>
+              <a:ext uri="{FF2B5EF4-FFF2-40B4-BE49-F238E27FC236}">
+                <a16:creationId xmlns:a16="http://schemas.microsoft.com/office/drawing/2014/main" id="{E4DCCB51-3740-FFD4-E8A8-933224F7F6C4}"/>
+              </a:ext>
+            </a:extLst>
+          </p:cNvPr>
+          <p:cNvSpPr txBox="1"/>
+          <p:nvPr/>
+        </p:nvSpPr>
+        <p:spPr>
+          <a:xfrm>
+            <a:off x="8194548" y="477556"/>
+            <a:ext cx="350219" cy="230832"/>
+          </a:xfrm>
+          <a:prstGeom prst="rect">
+            <a:avLst/>
+          </a:prstGeom>
+          <a:noFill/>
+        </p:spPr>
+        <p:txBody>
+          <a:bodyPr wrap="square" rtlCol="0">
+            <a:spAutoFit/>
+          </a:bodyPr>
+          <a:lstStyle/>
+          <a:p>
+            <a:r>
+              <a:rPr lang="en-US" sz="900" dirty="0">
+                <a:latin typeface="Arial" panose="020B0604020202020204" pitchFamily="34" charset="0"/>
+                <a:cs typeface="Arial" panose="020B0604020202020204" pitchFamily="34" charset="0"/>
+              </a:rPr>
+              <a:t>ns</a:t>
+            </a:r>
+          </a:p>
+        </p:txBody>
+      </p:sp>
+      <p:sp>
+        <p:nvSpPr>
+          <p:cNvPr id="51" name="TextBox 50">
+            <a:extLst>
+              <a:ext uri="{FF2B5EF4-FFF2-40B4-BE49-F238E27FC236}">
+                <a16:creationId xmlns:a16="http://schemas.microsoft.com/office/drawing/2014/main" id="{A6DEA022-1C91-88D6-CE8C-0F152E6D1445}"/>
+              </a:ext>
+            </a:extLst>
+          </p:cNvPr>
+          <p:cNvSpPr txBox="1"/>
+          <p:nvPr/>
+        </p:nvSpPr>
+        <p:spPr>
+          <a:xfrm>
+            <a:off x="8194548" y="588988"/>
+            <a:ext cx="350219" cy="230832"/>
+          </a:xfrm>
+          <a:prstGeom prst="rect">
+            <a:avLst/>
+          </a:prstGeom>
+          <a:noFill/>
+        </p:spPr>
+        <p:txBody>
+          <a:bodyPr wrap="square" rtlCol="0">
+            <a:spAutoFit/>
+          </a:bodyPr>
+          <a:lstStyle/>
+          <a:p>
+            <a:r>
+              <a:rPr lang="en-US" sz="900" dirty="0">
+                <a:latin typeface="Arial" panose="020B0604020202020204" pitchFamily="34" charset="0"/>
+                <a:cs typeface="Arial" panose="020B0604020202020204" pitchFamily="34" charset="0"/>
+              </a:rPr>
+              <a:t>ns</a:t>
+            </a:r>
+          </a:p>
+        </p:txBody>
+      </p:sp>
+      <p:sp>
+        <p:nvSpPr>
+          <p:cNvPr id="53" name="TextBox 52">
+            <a:extLst>
+              <a:ext uri="{FF2B5EF4-FFF2-40B4-BE49-F238E27FC236}">
+                <a16:creationId xmlns:a16="http://schemas.microsoft.com/office/drawing/2014/main" id="{65E487D1-B80D-9291-E026-D0D7B24D5B19}"/>
+              </a:ext>
+            </a:extLst>
+          </p:cNvPr>
+          <p:cNvSpPr txBox="1"/>
+          <p:nvPr/>
+        </p:nvSpPr>
+        <p:spPr>
+          <a:xfrm>
+            <a:off x="10575751" y="477556"/>
+            <a:ext cx="350219" cy="230832"/>
+          </a:xfrm>
+          <a:prstGeom prst="rect">
+            <a:avLst/>
+          </a:prstGeom>
+          <a:noFill/>
+        </p:spPr>
+        <p:txBody>
+          <a:bodyPr wrap="square" rtlCol="0">
+            <a:spAutoFit/>
+          </a:bodyPr>
+          <a:lstStyle/>
+          <a:p>
+            <a:r>
+              <a:rPr lang="en-US" sz="900" dirty="0">
+                <a:latin typeface="Arial" panose="020B0604020202020204" pitchFamily="34" charset="0"/>
+                <a:cs typeface="Arial" panose="020B0604020202020204" pitchFamily="34" charset="0"/>
+              </a:rPr>
+              <a:t>ns</a:t>
+            </a:r>
+          </a:p>
+        </p:txBody>
+      </p:sp>
+      <p:sp>
+        <p:nvSpPr>
+          <p:cNvPr id="54" name="TextBox 53">
+            <a:extLst>
+              <a:ext uri="{FF2B5EF4-FFF2-40B4-BE49-F238E27FC236}">
+                <a16:creationId xmlns:a16="http://schemas.microsoft.com/office/drawing/2014/main" id="{3DE6D1FF-AFFF-54BA-B128-69D49F4FC8C8}"/>
+              </a:ext>
+            </a:extLst>
+          </p:cNvPr>
+          <p:cNvSpPr txBox="1"/>
+          <p:nvPr/>
+        </p:nvSpPr>
+        <p:spPr>
+          <a:xfrm>
+            <a:off x="10575751" y="588988"/>
+            <a:ext cx="350219" cy="230832"/>
+          </a:xfrm>
+          <a:prstGeom prst="rect">
+            <a:avLst/>
+          </a:prstGeom>
+          <a:noFill/>
+        </p:spPr>
+        <p:txBody>
+          <a:bodyPr wrap="square" rtlCol="0">
+            <a:spAutoFit/>
+          </a:bodyPr>
+          <a:lstStyle/>
+          <a:p>
+            <a:r>
+              <a:rPr lang="en-US" sz="900" dirty="0">
+                <a:latin typeface="Arial" panose="020B0604020202020204" pitchFamily="34" charset="0"/>
+                <a:cs typeface="Arial" panose="020B0604020202020204" pitchFamily="34" charset="0"/>
+              </a:rPr>
+              <a:t>ns</a:t>
+            </a:r>
           </a:p>
         </p:txBody>
       </p:sp>
       <p:pic>
         <p:nvPicPr>
-          <p:cNvPr id="56" name="Picture 55">
-            <a:extLst>
-              <a:ext uri="{FF2B5EF4-FFF2-40B4-BE49-F238E27FC236}">
-                <a16:creationId xmlns:a16="http://schemas.microsoft.com/office/drawing/2014/main" id="{1267F596-4A7B-8F7C-C938-2F91832184F5}"/>
+          <p:cNvPr id="2" name="Picture 1">
+            <a:extLst>
+              <a:ext uri="{FF2B5EF4-FFF2-40B4-BE49-F238E27FC236}">
+                <a16:creationId xmlns:a16="http://schemas.microsoft.com/office/drawing/2014/main" id="{F9E96C2E-C448-7163-F555-B762839337B0}"/>
               </a:ext>
             </a:extLst>
           </p:cNvPr>
@@ -5813,896 +6999,6 @@
           </a:prstGeom>
         </p:spPr>
       </p:pic>
-      <p:sp>
-        <p:nvSpPr>
-          <p:cNvPr id="29" name="Rectangle 28">
-            <a:extLst>
-              <a:ext uri="{FF2B5EF4-FFF2-40B4-BE49-F238E27FC236}">
-                <a16:creationId xmlns:a16="http://schemas.microsoft.com/office/drawing/2014/main" id="{5EF699FE-A98E-C61B-B02D-D7179D623E81}"/>
-              </a:ext>
-            </a:extLst>
-          </p:cNvPr>
-          <p:cNvSpPr/>
-          <p:nvPr/>
-        </p:nvSpPr>
-        <p:spPr>
-          <a:xfrm>
-            <a:off x="1399540" y="472438"/>
-            <a:ext cx="236220" cy="101600"/>
-          </a:xfrm>
-          <a:prstGeom prst="rect">
-            <a:avLst/>
-          </a:prstGeom>
-          <a:solidFill>
-            <a:schemeClr val="bg1"/>
-          </a:solidFill>
-          <a:ln>
-            <a:solidFill>
-              <a:schemeClr val="bg1"/>
-            </a:solidFill>
-          </a:ln>
-        </p:spPr>
-        <p:style>
-          <a:lnRef idx="2">
-            <a:schemeClr val="accent1">
-              <a:shade val="15000"/>
-            </a:schemeClr>
-          </a:lnRef>
-          <a:fillRef idx="1">
-            <a:schemeClr val="accent1"/>
-          </a:fillRef>
-          <a:effectRef idx="0">
-            <a:schemeClr val="accent1"/>
-          </a:effectRef>
-          <a:fontRef idx="minor">
-            <a:schemeClr val="lt1"/>
-          </a:fontRef>
-        </p:style>
-        <p:txBody>
-          <a:bodyPr rtlCol="0" anchor="ctr"/>
-          <a:lstStyle/>
-          <a:p>
-            <a:pPr algn="ctr"/>
-            <a:endParaRPr lang="en-US"/>
-          </a:p>
-        </p:txBody>
-      </p:sp>
-      <p:sp>
-        <p:nvSpPr>
-          <p:cNvPr id="32" name="Rectangle 31">
-            <a:extLst>
-              <a:ext uri="{FF2B5EF4-FFF2-40B4-BE49-F238E27FC236}">
-                <a16:creationId xmlns:a16="http://schemas.microsoft.com/office/drawing/2014/main" id="{1A8DAC18-468A-1381-C1CA-6BCFFB126FEB}"/>
-              </a:ext>
-            </a:extLst>
-          </p:cNvPr>
-          <p:cNvSpPr/>
-          <p:nvPr/>
-        </p:nvSpPr>
-        <p:spPr>
-          <a:xfrm>
-            <a:off x="1345245" y="937896"/>
-            <a:ext cx="236220" cy="48891"/>
-          </a:xfrm>
-          <a:prstGeom prst="rect">
-            <a:avLst/>
-          </a:prstGeom>
-          <a:solidFill>
-            <a:schemeClr val="bg1"/>
-          </a:solidFill>
-          <a:ln>
-            <a:solidFill>
-              <a:schemeClr val="bg1"/>
-            </a:solidFill>
-          </a:ln>
-        </p:spPr>
-        <p:style>
-          <a:lnRef idx="2">
-            <a:schemeClr val="accent1">
-              <a:shade val="15000"/>
-            </a:schemeClr>
-          </a:lnRef>
-          <a:fillRef idx="1">
-            <a:schemeClr val="accent1"/>
-          </a:fillRef>
-          <a:effectRef idx="0">
-            <a:schemeClr val="accent1"/>
-          </a:effectRef>
-          <a:fontRef idx="minor">
-            <a:schemeClr val="lt1"/>
-          </a:fontRef>
-        </p:style>
-        <p:txBody>
-          <a:bodyPr rtlCol="0" anchor="ctr"/>
-          <a:lstStyle/>
-          <a:p>
-            <a:pPr algn="ctr"/>
-            <a:endParaRPr lang="en-US"/>
-          </a:p>
-        </p:txBody>
-      </p:sp>
-      <p:sp>
-        <p:nvSpPr>
-          <p:cNvPr id="37" name="Rectangle 36">
-            <a:extLst>
-              <a:ext uri="{FF2B5EF4-FFF2-40B4-BE49-F238E27FC236}">
-                <a16:creationId xmlns:a16="http://schemas.microsoft.com/office/drawing/2014/main" id="{735B2D46-0688-2B32-0E8F-A683233F3160}"/>
-              </a:ext>
-            </a:extLst>
-          </p:cNvPr>
-          <p:cNvSpPr/>
-          <p:nvPr/>
-        </p:nvSpPr>
-        <p:spPr>
-          <a:xfrm>
-            <a:off x="3770305" y="522930"/>
-            <a:ext cx="236220" cy="83191"/>
-          </a:xfrm>
-          <a:prstGeom prst="rect">
-            <a:avLst/>
-          </a:prstGeom>
-          <a:solidFill>
-            <a:schemeClr val="bg1"/>
-          </a:solidFill>
-          <a:ln>
-            <a:noFill/>
-          </a:ln>
-        </p:spPr>
-        <p:style>
-          <a:lnRef idx="2">
-            <a:schemeClr val="accent1">
-              <a:shade val="15000"/>
-            </a:schemeClr>
-          </a:lnRef>
-          <a:fillRef idx="1">
-            <a:schemeClr val="accent1"/>
-          </a:fillRef>
-          <a:effectRef idx="0">
-            <a:schemeClr val="accent1"/>
-          </a:effectRef>
-          <a:fontRef idx="minor">
-            <a:schemeClr val="lt1"/>
-          </a:fontRef>
-        </p:style>
-        <p:txBody>
-          <a:bodyPr rtlCol="0" anchor="ctr"/>
-          <a:lstStyle/>
-          <a:p>
-            <a:pPr algn="ctr"/>
-            <a:endParaRPr lang="en-US" dirty="0"/>
-          </a:p>
-        </p:txBody>
-      </p:sp>
-      <p:sp>
-        <p:nvSpPr>
-          <p:cNvPr id="39" name="Rectangle 38">
-            <a:extLst>
-              <a:ext uri="{FF2B5EF4-FFF2-40B4-BE49-F238E27FC236}">
-                <a16:creationId xmlns:a16="http://schemas.microsoft.com/office/drawing/2014/main" id="{CC1575CF-77B6-8E6B-5687-41DC7F9C8FA6}"/>
-              </a:ext>
-            </a:extLst>
-          </p:cNvPr>
-          <p:cNvSpPr/>
-          <p:nvPr/>
-        </p:nvSpPr>
-        <p:spPr>
-          <a:xfrm>
-            <a:off x="6216325" y="490847"/>
-            <a:ext cx="236220" cy="83191"/>
-          </a:xfrm>
-          <a:prstGeom prst="rect">
-            <a:avLst/>
-          </a:prstGeom>
-          <a:solidFill>
-            <a:schemeClr val="bg1"/>
-          </a:solidFill>
-          <a:ln>
-            <a:noFill/>
-          </a:ln>
-        </p:spPr>
-        <p:style>
-          <a:lnRef idx="2">
-            <a:schemeClr val="accent1">
-              <a:shade val="15000"/>
-            </a:schemeClr>
-          </a:lnRef>
-          <a:fillRef idx="1">
-            <a:schemeClr val="accent1"/>
-          </a:fillRef>
-          <a:effectRef idx="0">
-            <a:schemeClr val="accent1"/>
-          </a:effectRef>
-          <a:fontRef idx="minor">
-            <a:schemeClr val="lt1"/>
-          </a:fontRef>
-        </p:style>
-        <p:txBody>
-          <a:bodyPr rtlCol="0" anchor="ctr"/>
-          <a:lstStyle/>
-          <a:p>
-            <a:pPr algn="ctr"/>
-            <a:endParaRPr lang="en-US" dirty="0"/>
-          </a:p>
-        </p:txBody>
-      </p:sp>
-      <p:sp>
-        <p:nvSpPr>
-          <p:cNvPr id="40" name="Rectangle 39">
-            <a:extLst>
-              <a:ext uri="{FF2B5EF4-FFF2-40B4-BE49-F238E27FC236}">
-                <a16:creationId xmlns:a16="http://schemas.microsoft.com/office/drawing/2014/main" id="{7DF7E310-871F-22CC-A88E-AAF1872DDC03}"/>
-              </a:ext>
-            </a:extLst>
-          </p:cNvPr>
-          <p:cNvSpPr/>
-          <p:nvPr/>
-        </p:nvSpPr>
-        <p:spPr>
-          <a:xfrm>
-            <a:off x="8783169" y="493059"/>
-            <a:ext cx="236220" cy="83191"/>
-          </a:xfrm>
-          <a:prstGeom prst="rect">
-            <a:avLst/>
-          </a:prstGeom>
-          <a:solidFill>
-            <a:schemeClr val="bg1"/>
-          </a:solidFill>
-          <a:ln>
-            <a:noFill/>
-          </a:ln>
-        </p:spPr>
-        <p:style>
-          <a:lnRef idx="2">
-            <a:schemeClr val="accent1">
-              <a:shade val="15000"/>
-            </a:schemeClr>
-          </a:lnRef>
-          <a:fillRef idx="1">
-            <a:schemeClr val="accent1"/>
-          </a:fillRef>
-          <a:effectRef idx="0">
-            <a:schemeClr val="accent1"/>
-          </a:effectRef>
-          <a:fontRef idx="minor">
-            <a:schemeClr val="lt1"/>
-          </a:fontRef>
-        </p:style>
-        <p:txBody>
-          <a:bodyPr rtlCol="0" anchor="ctr"/>
-          <a:lstStyle/>
-          <a:p>
-            <a:pPr algn="ctr"/>
-            <a:endParaRPr lang="en-US" dirty="0"/>
-          </a:p>
-        </p:txBody>
-      </p:sp>
-      <p:sp>
-        <p:nvSpPr>
-          <p:cNvPr id="47" name="Rectangle 46">
-            <a:extLst>
-              <a:ext uri="{FF2B5EF4-FFF2-40B4-BE49-F238E27FC236}">
-                <a16:creationId xmlns:a16="http://schemas.microsoft.com/office/drawing/2014/main" id="{AA2BF28D-0F8C-32B4-B4A7-A8C77F0658D3}"/>
-              </a:ext>
-            </a:extLst>
-          </p:cNvPr>
-          <p:cNvSpPr/>
-          <p:nvPr/>
-        </p:nvSpPr>
-        <p:spPr>
-          <a:xfrm>
-            <a:off x="11071062" y="490847"/>
-            <a:ext cx="236220" cy="83191"/>
-          </a:xfrm>
-          <a:prstGeom prst="rect">
-            <a:avLst/>
-          </a:prstGeom>
-          <a:solidFill>
-            <a:schemeClr val="bg1"/>
-          </a:solidFill>
-          <a:ln>
-            <a:noFill/>
-          </a:ln>
-        </p:spPr>
-        <p:style>
-          <a:lnRef idx="2">
-            <a:schemeClr val="accent1">
-              <a:shade val="15000"/>
-            </a:schemeClr>
-          </a:lnRef>
-          <a:fillRef idx="1">
-            <a:schemeClr val="accent1"/>
-          </a:fillRef>
-          <a:effectRef idx="0">
-            <a:schemeClr val="accent1"/>
-          </a:effectRef>
-          <a:fontRef idx="minor">
-            <a:schemeClr val="lt1"/>
-          </a:fontRef>
-        </p:style>
-        <p:txBody>
-          <a:bodyPr rtlCol="0" anchor="ctr"/>
-          <a:lstStyle/>
-          <a:p>
-            <a:pPr algn="ctr"/>
-            <a:endParaRPr lang="en-US" dirty="0"/>
-          </a:p>
-        </p:txBody>
-      </p:sp>
-      <p:sp>
-        <p:nvSpPr>
-          <p:cNvPr id="6" name="TextBox 5">
-            <a:extLst>
-              <a:ext uri="{FF2B5EF4-FFF2-40B4-BE49-F238E27FC236}">
-                <a16:creationId xmlns:a16="http://schemas.microsoft.com/office/drawing/2014/main" id="{C2043A72-F85D-5049-D6DB-E38DFADDE366}"/>
-              </a:ext>
-            </a:extLst>
-          </p:cNvPr>
-          <p:cNvSpPr txBox="1"/>
-          <p:nvPr/>
-        </p:nvSpPr>
-        <p:spPr>
-          <a:xfrm>
-            <a:off x="816642" y="472438"/>
-            <a:ext cx="350219" cy="338554"/>
-          </a:xfrm>
-          <a:prstGeom prst="rect">
-            <a:avLst/>
-          </a:prstGeom>
-          <a:noFill/>
-        </p:spPr>
-        <p:txBody>
-          <a:bodyPr wrap="square" rtlCol="0">
-            <a:spAutoFit/>
-          </a:bodyPr>
-          <a:lstStyle/>
-          <a:p>
-            <a:r>
-              <a:rPr lang="en-US" sz="1600" dirty="0">
-                <a:latin typeface="Arial" panose="020B0604020202020204" pitchFamily="34" charset="0"/>
-                <a:cs typeface="Arial" panose="020B0604020202020204" pitchFamily="34" charset="0"/>
-              </a:rPr>
-              <a:t>**</a:t>
-            </a:r>
-          </a:p>
-        </p:txBody>
-      </p:sp>
-      <p:sp>
-        <p:nvSpPr>
-          <p:cNvPr id="7" name="TextBox 6">
-            <a:extLst>
-              <a:ext uri="{FF2B5EF4-FFF2-40B4-BE49-F238E27FC236}">
-                <a16:creationId xmlns:a16="http://schemas.microsoft.com/office/drawing/2014/main" id="{D1AFBB3C-EAD1-E796-1763-59A3C5675D59}"/>
-              </a:ext>
-            </a:extLst>
-          </p:cNvPr>
-          <p:cNvSpPr txBox="1"/>
-          <p:nvPr/>
-        </p:nvSpPr>
-        <p:spPr>
-          <a:xfrm>
-            <a:off x="816642" y="582166"/>
-            <a:ext cx="350219" cy="338554"/>
-          </a:xfrm>
-          <a:prstGeom prst="rect">
-            <a:avLst/>
-          </a:prstGeom>
-          <a:noFill/>
-        </p:spPr>
-        <p:txBody>
-          <a:bodyPr wrap="square" rtlCol="0">
-            <a:spAutoFit/>
-          </a:bodyPr>
-          <a:lstStyle/>
-          <a:p>
-            <a:r>
-              <a:rPr lang="en-US" sz="1600" dirty="0">
-                <a:latin typeface="Arial" panose="020B0604020202020204" pitchFamily="34" charset="0"/>
-                <a:cs typeface="Arial" panose="020B0604020202020204" pitchFamily="34" charset="0"/>
-              </a:rPr>
-              <a:t>*</a:t>
-            </a:r>
-          </a:p>
-        </p:txBody>
-      </p:sp>
-      <p:sp>
-        <p:nvSpPr>
-          <p:cNvPr id="8" name="TextBox 7">
-            <a:extLst>
-              <a:ext uri="{FF2B5EF4-FFF2-40B4-BE49-F238E27FC236}">
-                <a16:creationId xmlns:a16="http://schemas.microsoft.com/office/drawing/2014/main" id="{C65BD7AA-C0BD-1D08-BF5F-FCFB202FCA42}"/>
-              </a:ext>
-            </a:extLst>
-          </p:cNvPr>
-          <p:cNvSpPr txBox="1"/>
-          <p:nvPr/>
-        </p:nvSpPr>
-        <p:spPr>
-          <a:xfrm>
-            <a:off x="819218" y="701038"/>
-            <a:ext cx="350219" cy="338554"/>
-          </a:xfrm>
-          <a:prstGeom prst="rect">
-            <a:avLst/>
-          </a:prstGeom>
-          <a:noFill/>
-        </p:spPr>
-        <p:txBody>
-          <a:bodyPr wrap="square" rtlCol="0">
-            <a:spAutoFit/>
-          </a:bodyPr>
-          <a:lstStyle/>
-          <a:p>
-            <a:r>
-              <a:rPr lang="en-US" sz="1600" dirty="0">
-                <a:latin typeface="Arial" panose="020B0604020202020204" pitchFamily="34" charset="0"/>
-                <a:cs typeface="Arial" panose="020B0604020202020204" pitchFamily="34" charset="0"/>
-              </a:rPr>
-              <a:t>**</a:t>
-            </a:r>
-          </a:p>
-        </p:txBody>
-      </p:sp>
-      <p:sp>
-        <p:nvSpPr>
-          <p:cNvPr id="21" name="TextBox 20">
-            <a:extLst>
-              <a:ext uri="{FF2B5EF4-FFF2-40B4-BE49-F238E27FC236}">
-                <a16:creationId xmlns:a16="http://schemas.microsoft.com/office/drawing/2014/main" id="{2A8EBED4-E2B9-EF7D-AD50-5E195C4F4742}"/>
-              </a:ext>
-            </a:extLst>
-          </p:cNvPr>
-          <p:cNvSpPr txBox="1"/>
-          <p:nvPr/>
-        </p:nvSpPr>
-        <p:spPr>
-          <a:xfrm>
-            <a:off x="3256098" y="478154"/>
-            <a:ext cx="350219" cy="230832"/>
-          </a:xfrm>
-          <a:prstGeom prst="rect">
-            <a:avLst/>
-          </a:prstGeom>
-          <a:noFill/>
-        </p:spPr>
-        <p:txBody>
-          <a:bodyPr wrap="square" rtlCol="0">
-            <a:spAutoFit/>
-          </a:bodyPr>
-          <a:lstStyle/>
-          <a:p>
-            <a:r>
-              <a:rPr lang="en-US" sz="900" dirty="0">
-                <a:latin typeface="Arial" panose="020B0604020202020204" pitchFamily="34" charset="0"/>
-                <a:cs typeface="Arial" panose="020B0604020202020204" pitchFamily="34" charset="0"/>
-              </a:rPr>
-              <a:t>ns</a:t>
-            </a:r>
-          </a:p>
-        </p:txBody>
-      </p:sp>
-      <p:sp>
-        <p:nvSpPr>
-          <p:cNvPr id="22" name="TextBox 21">
-            <a:extLst>
-              <a:ext uri="{FF2B5EF4-FFF2-40B4-BE49-F238E27FC236}">
-                <a16:creationId xmlns:a16="http://schemas.microsoft.com/office/drawing/2014/main" id="{FA7BCB8F-BAF4-5812-0A70-C89C92EF441F}"/>
-              </a:ext>
-            </a:extLst>
-          </p:cNvPr>
-          <p:cNvSpPr txBox="1"/>
-          <p:nvPr/>
-        </p:nvSpPr>
-        <p:spPr>
-          <a:xfrm>
-            <a:off x="3256098" y="587882"/>
-            <a:ext cx="350219" cy="230832"/>
-          </a:xfrm>
-          <a:prstGeom prst="rect">
-            <a:avLst/>
-          </a:prstGeom>
-          <a:noFill/>
-        </p:spPr>
-        <p:txBody>
-          <a:bodyPr wrap="square" rtlCol="0">
-            <a:spAutoFit/>
-          </a:bodyPr>
-          <a:lstStyle/>
-          <a:p>
-            <a:r>
-              <a:rPr lang="en-US" sz="900" dirty="0">
-                <a:latin typeface="Arial" panose="020B0604020202020204" pitchFamily="34" charset="0"/>
-                <a:cs typeface="Arial" panose="020B0604020202020204" pitchFamily="34" charset="0"/>
-              </a:rPr>
-              <a:t>ns</a:t>
-            </a:r>
-          </a:p>
-        </p:txBody>
-      </p:sp>
-      <p:sp>
-        <p:nvSpPr>
-          <p:cNvPr id="23" name="TextBox 22">
-            <a:extLst>
-              <a:ext uri="{FF2B5EF4-FFF2-40B4-BE49-F238E27FC236}">
-                <a16:creationId xmlns:a16="http://schemas.microsoft.com/office/drawing/2014/main" id="{0F8ADCFE-9200-FCA0-0BAA-1B0ADBA8DE64}"/>
-              </a:ext>
-            </a:extLst>
-          </p:cNvPr>
-          <p:cNvSpPr txBox="1"/>
-          <p:nvPr/>
-        </p:nvSpPr>
-        <p:spPr>
-          <a:xfrm>
-            <a:off x="3258674" y="706754"/>
-            <a:ext cx="350219" cy="230832"/>
-          </a:xfrm>
-          <a:prstGeom prst="rect">
-            <a:avLst/>
-          </a:prstGeom>
-          <a:noFill/>
-        </p:spPr>
-        <p:txBody>
-          <a:bodyPr wrap="square" rtlCol="0">
-            <a:spAutoFit/>
-          </a:bodyPr>
-          <a:lstStyle/>
-          <a:p>
-            <a:r>
-              <a:rPr lang="en-US" sz="900" dirty="0">
-                <a:latin typeface="Arial" panose="020B0604020202020204" pitchFamily="34" charset="0"/>
-                <a:cs typeface="Arial" panose="020B0604020202020204" pitchFamily="34" charset="0"/>
-              </a:rPr>
-              <a:t>ns</a:t>
-            </a:r>
-            <a:endParaRPr lang="en-US" sz="1600" dirty="0">
-              <a:latin typeface="Arial" panose="020B0604020202020204" pitchFamily="34" charset="0"/>
-              <a:cs typeface="Arial" panose="020B0604020202020204" pitchFamily="34" charset="0"/>
-            </a:endParaRPr>
-          </a:p>
-        </p:txBody>
-      </p:sp>
-      <p:sp>
-        <p:nvSpPr>
-          <p:cNvPr id="27" name="TextBox 26">
-            <a:extLst>
-              <a:ext uri="{FF2B5EF4-FFF2-40B4-BE49-F238E27FC236}">
-                <a16:creationId xmlns:a16="http://schemas.microsoft.com/office/drawing/2014/main" id="{B271E376-2E84-2F26-451F-3F73F2A690BE}"/>
-              </a:ext>
-            </a:extLst>
-          </p:cNvPr>
-          <p:cNvSpPr txBox="1"/>
-          <p:nvPr/>
-        </p:nvSpPr>
-        <p:spPr>
-          <a:xfrm>
-            <a:off x="5678279" y="472438"/>
-            <a:ext cx="350219" cy="338554"/>
-          </a:xfrm>
-          <a:prstGeom prst="rect">
-            <a:avLst/>
-          </a:prstGeom>
-          <a:noFill/>
-        </p:spPr>
-        <p:txBody>
-          <a:bodyPr wrap="square" rtlCol="0">
-            <a:spAutoFit/>
-          </a:bodyPr>
-          <a:lstStyle/>
-          <a:p>
-            <a:r>
-              <a:rPr lang="en-US" sz="1600" dirty="0">
-                <a:latin typeface="Arial" panose="020B0604020202020204" pitchFamily="34" charset="0"/>
-                <a:cs typeface="Arial" panose="020B0604020202020204" pitchFamily="34" charset="0"/>
-              </a:rPr>
-              <a:t>**</a:t>
-            </a:r>
-          </a:p>
-        </p:txBody>
-      </p:sp>
-      <p:sp>
-        <p:nvSpPr>
-          <p:cNvPr id="48" name="TextBox 47">
-            <a:extLst>
-              <a:ext uri="{FF2B5EF4-FFF2-40B4-BE49-F238E27FC236}">
-                <a16:creationId xmlns:a16="http://schemas.microsoft.com/office/drawing/2014/main" id="{A4DF2C38-9AD8-F0AB-5B49-1B9514ABCC21}"/>
-              </a:ext>
-            </a:extLst>
-          </p:cNvPr>
-          <p:cNvSpPr txBox="1"/>
-          <p:nvPr/>
-        </p:nvSpPr>
-        <p:spPr>
-          <a:xfrm>
-            <a:off x="5678279" y="582166"/>
-            <a:ext cx="350219" cy="338554"/>
-          </a:xfrm>
-          <a:prstGeom prst="rect">
-            <a:avLst/>
-          </a:prstGeom>
-          <a:noFill/>
-        </p:spPr>
-        <p:txBody>
-          <a:bodyPr wrap="square" rtlCol="0">
-            <a:spAutoFit/>
-          </a:bodyPr>
-          <a:lstStyle/>
-          <a:p>
-            <a:r>
-              <a:rPr lang="en-US" sz="1600" dirty="0">
-                <a:latin typeface="Arial" panose="020B0604020202020204" pitchFamily="34" charset="0"/>
-                <a:cs typeface="Arial" panose="020B0604020202020204" pitchFamily="34" charset="0"/>
-              </a:rPr>
-              <a:t>**</a:t>
-            </a:r>
-          </a:p>
-        </p:txBody>
-      </p:sp>
-      <p:sp>
-        <p:nvSpPr>
-          <p:cNvPr id="49" name="TextBox 48">
-            <a:extLst>
-              <a:ext uri="{FF2B5EF4-FFF2-40B4-BE49-F238E27FC236}">
-                <a16:creationId xmlns:a16="http://schemas.microsoft.com/office/drawing/2014/main" id="{4DDF932E-70C4-3D79-679D-40A2237D5721}"/>
-              </a:ext>
-            </a:extLst>
-          </p:cNvPr>
-          <p:cNvSpPr txBox="1"/>
-          <p:nvPr/>
-        </p:nvSpPr>
-        <p:spPr>
-          <a:xfrm>
-            <a:off x="5680855" y="701038"/>
-            <a:ext cx="350219" cy="338554"/>
-          </a:xfrm>
-          <a:prstGeom prst="rect">
-            <a:avLst/>
-          </a:prstGeom>
-          <a:noFill/>
-        </p:spPr>
-        <p:txBody>
-          <a:bodyPr wrap="square" rtlCol="0">
-            <a:spAutoFit/>
-          </a:bodyPr>
-          <a:lstStyle/>
-          <a:p>
-            <a:r>
-              <a:rPr lang="en-US" sz="1600" dirty="0">
-                <a:latin typeface="Arial" panose="020B0604020202020204" pitchFamily="34" charset="0"/>
-                <a:cs typeface="Arial" panose="020B0604020202020204" pitchFamily="34" charset="0"/>
-              </a:rPr>
-              <a:t>**</a:t>
-            </a:r>
-          </a:p>
-        </p:txBody>
-      </p:sp>
-      <p:sp>
-        <p:nvSpPr>
-          <p:cNvPr id="50" name="TextBox 49">
-            <a:extLst>
-              <a:ext uri="{FF2B5EF4-FFF2-40B4-BE49-F238E27FC236}">
-                <a16:creationId xmlns:a16="http://schemas.microsoft.com/office/drawing/2014/main" id="{E4DCCB51-3740-FFD4-E8A8-933224F7F6C4}"/>
-              </a:ext>
-            </a:extLst>
-          </p:cNvPr>
-          <p:cNvSpPr txBox="1"/>
-          <p:nvPr/>
-        </p:nvSpPr>
-        <p:spPr>
-          <a:xfrm>
-            <a:off x="8194548" y="477556"/>
-            <a:ext cx="350219" cy="230832"/>
-          </a:xfrm>
-          <a:prstGeom prst="rect">
-            <a:avLst/>
-          </a:prstGeom>
-          <a:noFill/>
-        </p:spPr>
-        <p:txBody>
-          <a:bodyPr wrap="square" rtlCol="0">
-            <a:spAutoFit/>
-          </a:bodyPr>
-          <a:lstStyle/>
-          <a:p>
-            <a:r>
-              <a:rPr lang="en-US" sz="900" dirty="0">
-                <a:latin typeface="Arial" panose="020B0604020202020204" pitchFamily="34" charset="0"/>
-                <a:cs typeface="Arial" panose="020B0604020202020204" pitchFamily="34" charset="0"/>
-              </a:rPr>
-              <a:t>ns</a:t>
-            </a:r>
-          </a:p>
-        </p:txBody>
-      </p:sp>
-      <p:sp>
-        <p:nvSpPr>
-          <p:cNvPr id="51" name="TextBox 50">
-            <a:extLst>
-              <a:ext uri="{FF2B5EF4-FFF2-40B4-BE49-F238E27FC236}">
-                <a16:creationId xmlns:a16="http://schemas.microsoft.com/office/drawing/2014/main" id="{A6DEA022-1C91-88D6-CE8C-0F152E6D1445}"/>
-              </a:ext>
-            </a:extLst>
-          </p:cNvPr>
-          <p:cNvSpPr txBox="1"/>
-          <p:nvPr/>
-        </p:nvSpPr>
-        <p:spPr>
-          <a:xfrm>
-            <a:off x="8194548" y="588988"/>
-            <a:ext cx="350219" cy="230832"/>
-          </a:xfrm>
-          <a:prstGeom prst="rect">
-            <a:avLst/>
-          </a:prstGeom>
-          <a:noFill/>
-        </p:spPr>
-        <p:txBody>
-          <a:bodyPr wrap="square" rtlCol="0">
-            <a:spAutoFit/>
-          </a:bodyPr>
-          <a:lstStyle/>
-          <a:p>
-            <a:r>
-              <a:rPr lang="en-US" sz="900" dirty="0">
-                <a:latin typeface="Arial" panose="020B0604020202020204" pitchFamily="34" charset="0"/>
-                <a:cs typeface="Arial" panose="020B0604020202020204" pitchFamily="34" charset="0"/>
-              </a:rPr>
-              <a:t>ns</a:t>
-            </a:r>
-          </a:p>
-        </p:txBody>
-      </p:sp>
-      <p:sp>
-        <p:nvSpPr>
-          <p:cNvPr id="52" name="TextBox 51">
-            <a:extLst>
-              <a:ext uri="{FF2B5EF4-FFF2-40B4-BE49-F238E27FC236}">
-                <a16:creationId xmlns:a16="http://schemas.microsoft.com/office/drawing/2014/main" id="{70150D60-4F54-151F-75FE-769880A3F36A}"/>
-              </a:ext>
-            </a:extLst>
-          </p:cNvPr>
-          <p:cNvSpPr txBox="1"/>
-          <p:nvPr/>
-        </p:nvSpPr>
-        <p:spPr>
-          <a:xfrm>
-            <a:off x="8197124" y="699080"/>
-            <a:ext cx="350219" cy="230832"/>
-          </a:xfrm>
-          <a:prstGeom prst="rect">
-            <a:avLst/>
-          </a:prstGeom>
-          <a:noFill/>
-        </p:spPr>
-        <p:txBody>
-          <a:bodyPr wrap="square" rtlCol="0">
-            <a:spAutoFit/>
-          </a:bodyPr>
-          <a:lstStyle/>
-          <a:p>
-            <a:r>
-              <a:rPr lang="en-US" sz="900" dirty="0">
-                <a:latin typeface="Arial" panose="020B0604020202020204" pitchFamily="34" charset="0"/>
-                <a:cs typeface="Arial" panose="020B0604020202020204" pitchFamily="34" charset="0"/>
-              </a:rPr>
-              <a:t>ns</a:t>
-            </a:r>
-          </a:p>
-        </p:txBody>
-      </p:sp>
-      <p:sp>
-        <p:nvSpPr>
-          <p:cNvPr id="53" name="TextBox 52">
-            <a:extLst>
-              <a:ext uri="{FF2B5EF4-FFF2-40B4-BE49-F238E27FC236}">
-                <a16:creationId xmlns:a16="http://schemas.microsoft.com/office/drawing/2014/main" id="{65E487D1-B80D-9291-E026-D0D7B24D5B19}"/>
-              </a:ext>
-            </a:extLst>
-          </p:cNvPr>
-          <p:cNvSpPr txBox="1"/>
-          <p:nvPr/>
-        </p:nvSpPr>
-        <p:spPr>
-          <a:xfrm>
-            <a:off x="10575751" y="477556"/>
-            <a:ext cx="350219" cy="230832"/>
-          </a:xfrm>
-          <a:prstGeom prst="rect">
-            <a:avLst/>
-          </a:prstGeom>
-          <a:noFill/>
-        </p:spPr>
-        <p:txBody>
-          <a:bodyPr wrap="square" rtlCol="0">
-            <a:spAutoFit/>
-          </a:bodyPr>
-          <a:lstStyle/>
-          <a:p>
-            <a:r>
-              <a:rPr lang="en-US" sz="900" dirty="0">
-                <a:latin typeface="Arial" panose="020B0604020202020204" pitchFamily="34" charset="0"/>
-                <a:cs typeface="Arial" panose="020B0604020202020204" pitchFamily="34" charset="0"/>
-              </a:rPr>
-              <a:t>ns</a:t>
-            </a:r>
-          </a:p>
-        </p:txBody>
-      </p:sp>
-      <p:sp>
-        <p:nvSpPr>
-          <p:cNvPr id="54" name="TextBox 53">
-            <a:extLst>
-              <a:ext uri="{FF2B5EF4-FFF2-40B4-BE49-F238E27FC236}">
-                <a16:creationId xmlns:a16="http://schemas.microsoft.com/office/drawing/2014/main" id="{3DE6D1FF-AFFF-54BA-B128-69D49F4FC8C8}"/>
-              </a:ext>
-            </a:extLst>
-          </p:cNvPr>
-          <p:cNvSpPr txBox="1"/>
-          <p:nvPr/>
-        </p:nvSpPr>
-        <p:spPr>
-          <a:xfrm>
-            <a:off x="10575751" y="588988"/>
-            <a:ext cx="350219" cy="230832"/>
-          </a:xfrm>
-          <a:prstGeom prst="rect">
-            <a:avLst/>
-          </a:prstGeom>
-          <a:noFill/>
-        </p:spPr>
-        <p:txBody>
-          <a:bodyPr wrap="square" rtlCol="0">
-            <a:spAutoFit/>
-          </a:bodyPr>
-          <a:lstStyle/>
-          <a:p>
-            <a:r>
-              <a:rPr lang="en-US" sz="900" dirty="0">
-                <a:latin typeface="Arial" panose="020B0604020202020204" pitchFamily="34" charset="0"/>
-                <a:cs typeface="Arial" panose="020B0604020202020204" pitchFamily="34" charset="0"/>
-              </a:rPr>
-              <a:t>ns</a:t>
-            </a:r>
-          </a:p>
-        </p:txBody>
-      </p:sp>
-      <p:sp>
-        <p:nvSpPr>
-          <p:cNvPr id="55" name="TextBox 54">
-            <a:extLst>
-              <a:ext uri="{FF2B5EF4-FFF2-40B4-BE49-F238E27FC236}">
-                <a16:creationId xmlns:a16="http://schemas.microsoft.com/office/drawing/2014/main" id="{54FE9F9D-1305-4E89-A251-D40147C3FFF0}"/>
-              </a:ext>
-            </a:extLst>
-          </p:cNvPr>
-          <p:cNvSpPr txBox="1"/>
-          <p:nvPr/>
-        </p:nvSpPr>
-        <p:spPr>
-          <a:xfrm>
-            <a:off x="10575751" y="699080"/>
-            <a:ext cx="350219" cy="338554"/>
-          </a:xfrm>
-          <a:prstGeom prst="rect">
-            <a:avLst/>
-          </a:prstGeom>
-          <a:noFill/>
-        </p:spPr>
-        <p:txBody>
-          <a:bodyPr wrap="square" rtlCol="0">
-            <a:spAutoFit/>
-          </a:bodyPr>
-          <a:lstStyle/>
-          <a:p>
-            <a:r>
-              <a:rPr lang="en-US" sz="1600" dirty="0">
-                <a:latin typeface="Arial" panose="020B0604020202020204" pitchFamily="34" charset="0"/>
-                <a:cs typeface="Arial" panose="020B0604020202020204" pitchFamily="34" charset="0"/>
-              </a:rPr>
-              <a:t>*</a:t>
-            </a:r>
-          </a:p>
-        </p:txBody>
-      </p:sp>
     </p:spTree>
     <p:extLst>
       <p:ext uri="{BB962C8B-B14F-4D97-AF65-F5344CB8AC3E}">
@@ -6741,10 +7037,10 @@
       </p:grpSpPr>
       <p:pic>
         <p:nvPicPr>
-          <p:cNvPr id="2" name="Picture 1">
-            <a:extLst>
-              <a:ext uri="{FF2B5EF4-FFF2-40B4-BE49-F238E27FC236}">
-                <a16:creationId xmlns:a16="http://schemas.microsoft.com/office/drawing/2014/main" id="{F367F566-5FCD-9EFA-01F3-3C2BB11609AB}"/>
+          <p:cNvPr id="7" name="Picture 6">
+            <a:extLst>
+              <a:ext uri="{FF2B5EF4-FFF2-40B4-BE49-F238E27FC236}">
+                <a16:creationId xmlns:a16="http://schemas.microsoft.com/office/drawing/2014/main" id="{CAFFE8FE-E1DE-8B41-FC25-CADB2D12F480}"/>
               </a:ext>
             </a:extLst>
           </p:cNvPr>
@@ -6761,584 +7057,14 @@
         </p:blipFill>
         <p:spPr>
           <a:xfrm>
-            <a:off x="0" y="176784"/>
-            <a:ext cx="12192000" cy="6504432"/>
+            <a:off x="0" y="180033"/>
+            <a:ext cx="12192000" cy="6497934"/>
           </a:xfrm>
           <a:prstGeom prst="rect">
             <a:avLst/>
           </a:prstGeom>
         </p:spPr>
       </p:pic>
-      <p:sp>
-        <p:nvSpPr>
-          <p:cNvPr id="3" name="TextBox 2">
-            <a:extLst>
-              <a:ext uri="{FF2B5EF4-FFF2-40B4-BE49-F238E27FC236}">
-                <a16:creationId xmlns:a16="http://schemas.microsoft.com/office/drawing/2014/main" id="{73E6BF4E-30B3-2537-B5A1-C2D73F490253}"/>
-              </a:ext>
-            </a:extLst>
-          </p:cNvPr>
-          <p:cNvSpPr txBox="1"/>
-          <p:nvPr/>
-        </p:nvSpPr>
-        <p:spPr>
-          <a:xfrm>
-            <a:off x="1135380" y="835660"/>
-            <a:ext cx="388620" cy="369332"/>
-          </a:xfrm>
-          <a:prstGeom prst="rect">
-            <a:avLst/>
-          </a:prstGeom>
-          <a:noFill/>
-        </p:spPr>
-        <p:txBody>
-          <a:bodyPr wrap="square" rtlCol="0">
-            <a:spAutoFit/>
-          </a:bodyPr>
-          <a:lstStyle/>
-          <a:p>
-            <a:r>
-              <a:rPr lang="en-US" dirty="0">
-                <a:latin typeface="Arial" panose="020B0604020202020204" pitchFamily="34" charset="0"/>
-                <a:cs typeface="Arial" panose="020B0604020202020204" pitchFamily="34" charset="0"/>
-              </a:rPr>
-              <a:t>**</a:t>
-            </a:r>
-          </a:p>
-        </p:txBody>
-      </p:sp>
-      <p:sp>
-        <p:nvSpPr>
-          <p:cNvPr id="4" name="TextBox 3">
-            <a:extLst>
-              <a:ext uri="{FF2B5EF4-FFF2-40B4-BE49-F238E27FC236}">
-                <a16:creationId xmlns:a16="http://schemas.microsoft.com/office/drawing/2014/main" id="{81936BA9-FD79-4ADD-C0EF-8E216B034F69}"/>
-              </a:ext>
-            </a:extLst>
-          </p:cNvPr>
-          <p:cNvSpPr txBox="1"/>
-          <p:nvPr/>
-        </p:nvSpPr>
-        <p:spPr>
-          <a:xfrm>
-            <a:off x="1135380" y="650994"/>
-            <a:ext cx="388620" cy="369332"/>
-          </a:xfrm>
-          <a:prstGeom prst="rect">
-            <a:avLst/>
-          </a:prstGeom>
-          <a:noFill/>
-        </p:spPr>
-        <p:txBody>
-          <a:bodyPr wrap="square" rtlCol="0">
-            <a:spAutoFit/>
-          </a:bodyPr>
-          <a:lstStyle/>
-          <a:p>
-            <a:r>
-              <a:rPr lang="en-US" dirty="0">
-                <a:latin typeface="Arial" panose="020B0604020202020204" pitchFamily="34" charset="0"/>
-                <a:cs typeface="Arial" panose="020B0604020202020204" pitchFamily="34" charset="0"/>
-              </a:rPr>
-              <a:t>*</a:t>
-            </a:r>
-          </a:p>
-        </p:txBody>
-      </p:sp>
-      <p:sp>
-        <p:nvSpPr>
-          <p:cNvPr id="6" name="TextBox 5">
-            <a:extLst>
-              <a:ext uri="{FF2B5EF4-FFF2-40B4-BE49-F238E27FC236}">
-                <a16:creationId xmlns:a16="http://schemas.microsoft.com/office/drawing/2014/main" id="{E8AF8BF9-7232-5697-1E53-D761E3FF3B7D}"/>
-              </a:ext>
-            </a:extLst>
-          </p:cNvPr>
-          <p:cNvSpPr txBox="1"/>
-          <p:nvPr/>
-        </p:nvSpPr>
-        <p:spPr>
-          <a:xfrm>
-            <a:off x="1135380" y="466328"/>
-            <a:ext cx="388620" cy="369332"/>
-          </a:xfrm>
-          <a:prstGeom prst="rect">
-            <a:avLst/>
-          </a:prstGeom>
-          <a:noFill/>
-        </p:spPr>
-        <p:txBody>
-          <a:bodyPr wrap="square" rtlCol="0">
-            <a:spAutoFit/>
-          </a:bodyPr>
-          <a:lstStyle/>
-          <a:p>
-            <a:r>
-              <a:rPr lang="en-US" dirty="0">
-                <a:latin typeface="Arial" panose="020B0604020202020204" pitchFamily="34" charset="0"/>
-                <a:cs typeface="Arial" panose="020B0604020202020204" pitchFamily="34" charset="0"/>
-              </a:rPr>
-              <a:t>**</a:t>
-            </a:r>
-          </a:p>
-        </p:txBody>
-      </p:sp>
-      <p:sp>
-        <p:nvSpPr>
-          <p:cNvPr id="12" name="TextBox 11">
-            <a:extLst>
-              <a:ext uri="{FF2B5EF4-FFF2-40B4-BE49-F238E27FC236}">
-                <a16:creationId xmlns:a16="http://schemas.microsoft.com/office/drawing/2014/main" id="{3EBB96EF-0AEB-1471-272C-31B4EF363E4C}"/>
-              </a:ext>
-            </a:extLst>
-          </p:cNvPr>
-          <p:cNvSpPr txBox="1"/>
-          <p:nvPr/>
-        </p:nvSpPr>
-        <p:spPr>
-          <a:xfrm>
-            <a:off x="5901690" y="481181"/>
-            <a:ext cx="388620" cy="369332"/>
-          </a:xfrm>
-          <a:prstGeom prst="rect">
-            <a:avLst/>
-          </a:prstGeom>
-          <a:noFill/>
-        </p:spPr>
-        <p:txBody>
-          <a:bodyPr wrap="square" rtlCol="0">
-            <a:spAutoFit/>
-          </a:bodyPr>
-          <a:lstStyle/>
-          <a:p>
-            <a:r>
-              <a:rPr lang="en-US" dirty="0">
-                <a:latin typeface="Arial" panose="020B0604020202020204" pitchFamily="34" charset="0"/>
-                <a:cs typeface="Arial" panose="020B0604020202020204" pitchFamily="34" charset="0"/>
-              </a:rPr>
-              <a:t>*</a:t>
-            </a:r>
-          </a:p>
-        </p:txBody>
-      </p:sp>
-      <p:sp>
-        <p:nvSpPr>
-          <p:cNvPr id="20" name="TextBox 19">
-            <a:extLst>
-              <a:ext uri="{FF2B5EF4-FFF2-40B4-BE49-F238E27FC236}">
-                <a16:creationId xmlns:a16="http://schemas.microsoft.com/office/drawing/2014/main" id="{07C82C3B-CD0A-4A41-1F88-DD48D85D5B03}"/>
-              </a:ext>
-            </a:extLst>
-          </p:cNvPr>
-          <p:cNvSpPr txBox="1"/>
-          <p:nvPr/>
-        </p:nvSpPr>
-        <p:spPr>
-          <a:xfrm>
-            <a:off x="8349401" y="466328"/>
-            <a:ext cx="388620" cy="369332"/>
-          </a:xfrm>
-          <a:prstGeom prst="rect">
-            <a:avLst/>
-          </a:prstGeom>
-          <a:noFill/>
-        </p:spPr>
-        <p:txBody>
-          <a:bodyPr wrap="square" rtlCol="0">
-            <a:spAutoFit/>
-          </a:bodyPr>
-          <a:lstStyle/>
-          <a:p>
-            <a:r>
-              <a:rPr lang="en-US" dirty="0">
-                <a:latin typeface="Arial" panose="020B0604020202020204" pitchFamily="34" charset="0"/>
-                <a:cs typeface="Arial" panose="020B0604020202020204" pitchFamily="34" charset="0"/>
-              </a:rPr>
-              <a:t>*</a:t>
-            </a:r>
-          </a:p>
-        </p:txBody>
-      </p:sp>
-      <p:sp>
-        <p:nvSpPr>
-          <p:cNvPr id="31" name="TextBox 30">
-            <a:extLst>
-              <a:ext uri="{FF2B5EF4-FFF2-40B4-BE49-F238E27FC236}">
-                <a16:creationId xmlns:a16="http://schemas.microsoft.com/office/drawing/2014/main" id="{C8F0733A-B499-47F0-E0F9-769FD8F358FA}"/>
-              </a:ext>
-            </a:extLst>
-          </p:cNvPr>
-          <p:cNvSpPr txBox="1"/>
-          <p:nvPr/>
-        </p:nvSpPr>
-        <p:spPr>
-          <a:xfrm>
-            <a:off x="3597933" y="860294"/>
-            <a:ext cx="464881" cy="307777"/>
-          </a:xfrm>
-          <a:prstGeom prst="rect">
-            <a:avLst/>
-          </a:prstGeom>
-          <a:noFill/>
-        </p:spPr>
-        <p:txBody>
-          <a:bodyPr wrap="square" rtlCol="0">
-            <a:spAutoFit/>
-          </a:bodyPr>
-          <a:lstStyle/>
-          <a:p>
-            <a:r>
-              <a:rPr lang="en-US" sz="1400" dirty="0">
-                <a:latin typeface="Arial" panose="020B0604020202020204" pitchFamily="34" charset="0"/>
-                <a:cs typeface="Arial" panose="020B0604020202020204" pitchFamily="34" charset="0"/>
-              </a:rPr>
-              <a:t>ns</a:t>
-            </a:r>
-          </a:p>
-        </p:txBody>
-      </p:sp>
-      <p:sp>
-        <p:nvSpPr>
-          <p:cNvPr id="32" name="TextBox 31">
-            <a:extLst>
-              <a:ext uri="{FF2B5EF4-FFF2-40B4-BE49-F238E27FC236}">
-                <a16:creationId xmlns:a16="http://schemas.microsoft.com/office/drawing/2014/main" id="{8DD6E756-0CC3-77D2-363B-7A6CD265044F}"/>
-              </a:ext>
-            </a:extLst>
-          </p:cNvPr>
-          <p:cNvSpPr txBox="1"/>
-          <p:nvPr/>
-        </p:nvSpPr>
-        <p:spPr>
-          <a:xfrm>
-            <a:off x="3597932" y="696625"/>
-            <a:ext cx="464881" cy="307777"/>
-          </a:xfrm>
-          <a:prstGeom prst="rect">
-            <a:avLst/>
-          </a:prstGeom>
-          <a:noFill/>
-        </p:spPr>
-        <p:txBody>
-          <a:bodyPr wrap="square" rtlCol="0">
-            <a:spAutoFit/>
-          </a:bodyPr>
-          <a:lstStyle/>
-          <a:p>
-            <a:r>
-              <a:rPr lang="en-US" sz="1400" dirty="0">
-                <a:latin typeface="Arial" panose="020B0604020202020204" pitchFamily="34" charset="0"/>
-                <a:cs typeface="Arial" panose="020B0604020202020204" pitchFamily="34" charset="0"/>
-              </a:rPr>
-              <a:t>ns</a:t>
-            </a:r>
-          </a:p>
-        </p:txBody>
-      </p:sp>
-      <p:sp>
-        <p:nvSpPr>
-          <p:cNvPr id="33" name="TextBox 32">
-            <a:extLst>
-              <a:ext uri="{FF2B5EF4-FFF2-40B4-BE49-F238E27FC236}">
-                <a16:creationId xmlns:a16="http://schemas.microsoft.com/office/drawing/2014/main" id="{25EC7661-BB91-FC48-6C29-7058B406BDEA}"/>
-              </a:ext>
-            </a:extLst>
-          </p:cNvPr>
-          <p:cNvSpPr txBox="1"/>
-          <p:nvPr/>
-        </p:nvSpPr>
-        <p:spPr>
-          <a:xfrm>
-            <a:off x="3597932" y="532773"/>
-            <a:ext cx="464881" cy="307777"/>
-          </a:xfrm>
-          <a:prstGeom prst="rect">
-            <a:avLst/>
-          </a:prstGeom>
-          <a:noFill/>
-        </p:spPr>
-        <p:txBody>
-          <a:bodyPr wrap="square" rtlCol="0">
-            <a:spAutoFit/>
-          </a:bodyPr>
-          <a:lstStyle/>
-          <a:p>
-            <a:r>
-              <a:rPr lang="en-US" sz="1400" dirty="0">
-                <a:latin typeface="Arial" panose="020B0604020202020204" pitchFamily="34" charset="0"/>
-                <a:cs typeface="Arial" panose="020B0604020202020204" pitchFamily="34" charset="0"/>
-              </a:rPr>
-              <a:t>ns</a:t>
-            </a:r>
-          </a:p>
-        </p:txBody>
-      </p:sp>
-      <p:sp>
-        <p:nvSpPr>
-          <p:cNvPr id="34" name="TextBox 33">
-            <a:extLst>
-              <a:ext uri="{FF2B5EF4-FFF2-40B4-BE49-F238E27FC236}">
-                <a16:creationId xmlns:a16="http://schemas.microsoft.com/office/drawing/2014/main" id="{FB58C94B-D558-A8DC-FF53-0B6244406FC9}"/>
-              </a:ext>
-            </a:extLst>
-          </p:cNvPr>
-          <p:cNvSpPr txBox="1"/>
-          <p:nvPr/>
-        </p:nvSpPr>
-        <p:spPr>
-          <a:xfrm>
-            <a:off x="8349401" y="786421"/>
-            <a:ext cx="464881" cy="307777"/>
-          </a:xfrm>
-          <a:prstGeom prst="rect">
-            <a:avLst/>
-          </a:prstGeom>
-          <a:noFill/>
-        </p:spPr>
-        <p:txBody>
-          <a:bodyPr wrap="square" rtlCol="0">
-            <a:spAutoFit/>
-          </a:bodyPr>
-          <a:lstStyle/>
-          <a:p>
-            <a:r>
-              <a:rPr lang="en-US" sz="1400" dirty="0">
-                <a:latin typeface="Arial" panose="020B0604020202020204" pitchFamily="34" charset="0"/>
-                <a:cs typeface="Arial" panose="020B0604020202020204" pitchFamily="34" charset="0"/>
-              </a:rPr>
-              <a:t>ns</a:t>
-            </a:r>
-          </a:p>
-        </p:txBody>
-      </p:sp>
-      <p:sp>
-        <p:nvSpPr>
-          <p:cNvPr id="35" name="TextBox 34">
-            <a:extLst>
-              <a:ext uri="{FF2B5EF4-FFF2-40B4-BE49-F238E27FC236}">
-                <a16:creationId xmlns:a16="http://schemas.microsoft.com/office/drawing/2014/main" id="{C54FB3AD-808D-0E0A-CB51-2E2B7CE88CAC}"/>
-              </a:ext>
-            </a:extLst>
-          </p:cNvPr>
-          <p:cNvSpPr txBox="1"/>
-          <p:nvPr/>
-        </p:nvSpPr>
-        <p:spPr>
-          <a:xfrm>
-            <a:off x="8349400" y="607407"/>
-            <a:ext cx="464881" cy="307777"/>
-          </a:xfrm>
-          <a:prstGeom prst="rect">
-            <a:avLst/>
-          </a:prstGeom>
-          <a:noFill/>
-        </p:spPr>
-        <p:txBody>
-          <a:bodyPr wrap="square" rtlCol="0">
-            <a:spAutoFit/>
-          </a:bodyPr>
-          <a:lstStyle/>
-          <a:p>
-            <a:r>
-              <a:rPr lang="en-US" sz="1400" dirty="0">
-                <a:latin typeface="Arial" panose="020B0604020202020204" pitchFamily="34" charset="0"/>
-                <a:cs typeface="Arial" panose="020B0604020202020204" pitchFamily="34" charset="0"/>
-              </a:rPr>
-              <a:t>ns</a:t>
-            </a:r>
-          </a:p>
-        </p:txBody>
-      </p:sp>
-      <p:sp>
-        <p:nvSpPr>
-          <p:cNvPr id="36" name="TextBox 35">
-            <a:extLst>
-              <a:ext uri="{FF2B5EF4-FFF2-40B4-BE49-F238E27FC236}">
-                <a16:creationId xmlns:a16="http://schemas.microsoft.com/office/drawing/2014/main" id="{076E8BF4-C68C-0150-97C3-A3D6F4EFBA34}"/>
-              </a:ext>
-            </a:extLst>
-          </p:cNvPr>
-          <p:cNvSpPr txBox="1"/>
-          <p:nvPr/>
-        </p:nvSpPr>
-        <p:spPr>
-          <a:xfrm>
-            <a:off x="10849167" y="466328"/>
-            <a:ext cx="388620" cy="369332"/>
-          </a:xfrm>
-          <a:prstGeom prst="rect">
-            <a:avLst/>
-          </a:prstGeom>
-          <a:noFill/>
-        </p:spPr>
-        <p:txBody>
-          <a:bodyPr wrap="square" rtlCol="0">
-            <a:spAutoFit/>
-          </a:bodyPr>
-          <a:lstStyle/>
-          <a:p>
-            <a:r>
-              <a:rPr lang="en-US" dirty="0">
-                <a:latin typeface="Arial" panose="020B0604020202020204" pitchFamily="34" charset="0"/>
-                <a:cs typeface="Arial" panose="020B0604020202020204" pitchFamily="34" charset="0"/>
-              </a:rPr>
-              <a:t>*</a:t>
-            </a:r>
-          </a:p>
-        </p:txBody>
-      </p:sp>
-      <p:sp>
-        <p:nvSpPr>
-          <p:cNvPr id="37" name="TextBox 36">
-            <a:extLst>
-              <a:ext uri="{FF2B5EF4-FFF2-40B4-BE49-F238E27FC236}">
-                <a16:creationId xmlns:a16="http://schemas.microsoft.com/office/drawing/2014/main" id="{C2E6296A-71E5-4D4D-F610-FD3FD29E1AE6}"/>
-              </a:ext>
-            </a:extLst>
-          </p:cNvPr>
-          <p:cNvSpPr txBox="1"/>
-          <p:nvPr/>
-        </p:nvSpPr>
-        <p:spPr>
-          <a:xfrm>
-            <a:off x="10849167" y="786421"/>
-            <a:ext cx="464881" cy="307777"/>
-          </a:xfrm>
-          <a:prstGeom prst="rect">
-            <a:avLst/>
-          </a:prstGeom>
-          <a:noFill/>
-        </p:spPr>
-        <p:txBody>
-          <a:bodyPr wrap="square" rtlCol="0">
-            <a:spAutoFit/>
-          </a:bodyPr>
-          <a:lstStyle/>
-          <a:p>
-            <a:r>
-              <a:rPr lang="en-US" sz="1400" dirty="0">
-                <a:latin typeface="Arial" panose="020B0604020202020204" pitchFamily="34" charset="0"/>
-                <a:cs typeface="Arial" panose="020B0604020202020204" pitchFamily="34" charset="0"/>
-              </a:rPr>
-              <a:t>ns</a:t>
-            </a:r>
-          </a:p>
-        </p:txBody>
-      </p:sp>
-      <p:sp>
-        <p:nvSpPr>
-          <p:cNvPr id="38" name="TextBox 37">
-            <a:extLst>
-              <a:ext uri="{FF2B5EF4-FFF2-40B4-BE49-F238E27FC236}">
-                <a16:creationId xmlns:a16="http://schemas.microsoft.com/office/drawing/2014/main" id="{3BB06FA2-B71E-A28C-CDBC-AC5CD1E0E635}"/>
-              </a:ext>
-            </a:extLst>
-          </p:cNvPr>
-          <p:cNvSpPr txBox="1"/>
-          <p:nvPr/>
-        </p:nvSpPr>
-        <p:spPr>
-          <a:xfrm>
-            <a:off x="10849166" y="607407"/>
-            <a:ext cx="464881" cy="307777"/>
-          </a:xfrm>
-          <a:prstGeom prst="rect">
-            <a:avLst/>
-          </a:prstGeom>
-          <a:noFill/>
-        </p:spPr>
-        <p:txBody>
-          <a:bodyPr wrap="square" rtlCol="0">
-            <a:spAutoFit/>
-          </a:bodyPr>
-          <a:lstStyle/>
-          <a:p>
-            <a:r>
-              <a:rPr lang="en-US" sz="1400" dirty="0">
-                <a:latin typeface="Arial" panose="020B0604020202020204" pitchFamily="34" charset="0"/>
-                <a:cs typeface="Arial" panose="020B0604020202020204" pitchFamily="34" charset="0"/>
-              </a:rPr>
-              <a:t>ns</a:t>
-            </a:r>
-          </a:p>
-        </p:txBody>
-      </p:sp>
-      <p:sp>
-        <p:nvSpPr>
-          <p:cNvPr id="40" name="TextBox 39">
-            <a:extLst>
-              <a:ext uri="{FF2B5EF4-FFF2-40B4-BE49-F238E27FC236}">
-                <a16:creationId xmlns:a16="http://schemas.microsoft.com/office/drawing/2014/main" id="{C1A0D3F1-E1C0-BDE0-2B18-F0D3E8A9A638}"/>
-              </a:ext>
-            </a:extLst>
-          </p:cNvPr>
-          <p:cNvSpPr txBox="1"/>
-          <p:nvPr/>
-        </p:nvSpPr>
-        <p:spPr>
-          <a:xfrm>
-            <a:off x="5901690" y="650994"/>
-            <a:ext cx="388620" cy="369332"/>
-          </a:xfrm>
-          <a:prstGeom prst="rect">
-            <a:avLst/>
-          </a:prstGeom>
-          <a:noFill/>
-        </p:spPr>
-        <p:txBody>
-          <a:bodyPr wrap="square" rtlCol="0">
-            <a:spAutoFit/>
-          </a:bodyPr>
-          <a:lstStyle/>
-          <a:p>
-            <a:r>
-              <a:rPr lang="en-US" dirty="0">
-                <a:latin typeface="Arial" panose="020B0604020202020204" pitchFamily="34" charset="0"/>
-                <a:cs typeface="Arial" panose="020B0604020202020204" pitchFamily="34" charset="0"/>
-              </a:rPr>
-              <a:t>**</a:t>
-            </a:r>
-          </a:p>
-        </p:txBody>
-      </p:sp>
-      <p:sp>
-        <p:nvSpPr>
-          <p:cNvPr id="41" name="TextBox 40">
-            <a:extLst>
-              <a:ext uri="{FF2B5EF4-FFF2-40B4-BE49-F238E27FC236}">
-                <a16:creationId xmlns:a16="http://schemas.microsoft.com/office/drawing/2014/main" id="{AEE1A74B-EB37-6893-FCA1-EA1EA60362B0}"/>
-              </a:ext>
-            </a:extLst>
-          </p:cNvPr>
-          <p:cNvSpPr txBox="1"/>
-          <p:nvPr/>
-        </p:nvSpPr>
-        <p:spPr>
-          <a:xfrm>
-            <a:off x="5901690" y="835660"/>
-            <a:ext cx="388620" cy="369332"/>
-          </a:xfrm>
-          <a:prstGeom prst="rect">
-            <a:avLst/>
-          </a:prstGeom>
-          <a:noFill/>
-        </p:spPr>
-        <p:txBody>
-          <a:bodyPr wrap="square" rtlCol="0">
-            <a:spAutoFit/>
-          </a:bodyPr>
-          <a:lstStyle/>
-          <a:p>
-            <a:r>
-              <a:rPr lang="en-US" dirty="0">
-                <a:latin typeface="Arial" panose="020B0604020202020204" pitchFamily="34" charset="0"/>
-                <a:cs typeface="Arial" panose="020B0604020202020204" pitchFamily="34" charset="0"/>
-              </a:rPr>
-              <a:t>**</a:t>
-            </a:r>
-          </a:p>
-        </p:txBody>
-      </p:sp>
     </p:spTree>
     <p:extLst>
       <p:ext uri="{BB962C8B-B14F-4D97-AF65-F5344CB8AC3E}">
@@ -7665,4 +7391,319 @@
     </a:ext>
   </a:extLst>
 </a:theme>
+</file>
+
+<file path=ppt/theme/theme2.xml><?xml version="1.0" encoding="utf-8"?>
+<a:theme xmlns:a="http://schemas.openxmlformats.org/drawingml/2006/main" name="Office Theme">
+  <a:themeElements>
+    <a:clrScheme name="Office">
+      <a:dk1>
+        <a:sysClr val="windowText" lastClr="000000"/>
+      </a:dk1>
+      <a:lt1>
+        <a:sysClr val="window" lastClr="FFFFFF"/>
+      </a:lt1>
+      <a:dk2>
+        <a:srgbClr val="0E2841"/>
+      </a:dk2>
+      <a:lt2>
+        <a:srgbClr val="E8E8E8"/>
+      </a:lt2>
+      <a:accent1>
+        <a:srgbClr val="156082"/>
+      </a:accent1>
+      <a:accent2>
+        <a:srgbClr val="E97132"/>
+      </a:accent2>
+      <a:accent3>
+        <a:srgbClr val="196B24"/>
+      </a:accent3>
+      <a:accent4>
+        <a:srgbClr val="0F9ED5"/>
+      </a:accent4>
+      <a:accent5>
+        <a:srgbClr val="A02B93"/>
+      </a:accent5>
+      <a:accent6>
+        <a:srgbClr val="4EA72E"/>
+      </a:accent6>
+      <a:hlink>
+        <a:srgbClr val="467886"/>
+      </a:hlink>
+      <a:folHlink>
+        <a:srgbClr val="96607D"/>
+      </a:folHlink>
+    </a:clrScheme>
+    <a:fontScheme name="Office">
+      <a:majorFont>
+        <a:latin typeface="Aptos Display" panose="02110004020202020204"/>
+        <a:ea typeface=""/>
+        <a:cs typeface=""/>
+        <a:font script="Jpan" typeface="游ゴシック Light"/>
+        <a:font script="Hang" typeface="맑은 고딕"/>
+        <a:font script="Hans" typeface="等线 Light"/>
+        <a:font script="Hant" typeface="新細明體"/>
+        <a:font script="Arab" typeface="Times New Roman"/>
+        <a:font script="Hebr" typeface="Times New Roman"/>
+        <a:font script="Thai" typeface="Angsana New"/>
+        <a:font script="Ethi" typeface="Nyala"/>
+        <a:font script="Beng" typeface="Vrinda"/>
+        <a:font script="Gujr" typeface="Shruti"/>
+        <a:font script="Khmr" typeface="MoolBoran"/>
+        <a:font script="Knda" typeface="Tunga"/>
+        <a:font script="Guru" typeface="Raavi"/>
+        <a:font script="Cans" typeface="Euphemia"/>
+        <a:font script="Cher" typeface="Plantagenet Cherokee"/>
+        <a:font script="Yiii" typeface="Microsoft Yi Baiti"/>
+        <a:font script="Tibt" typeface="Microsoft Himalaya"/>
+        <a:font script="Thaa" typeface="MV Boli"/>
+        <a:font script="Deva" typeface="Mangal"/>
+        <a:font script="Telu" typeface="Gautami"/>
+        <a:font script="Taml" typeface="Latha"/>
+        <a:font script="Syrc" typeface="Estrangelo Edessa"/>
+        <a:font script="Orya" typeface="Kalinga"/>
+        <a:font script="Mlym" typeface="Kartika"/>
+        <a:font script="Laoo" typeface="DokChampa"/>
+        <a:font script="Sinh" typeface="Iskoola Pota"/>
+        <a:font script="Mong" typeface="Mongolian Baiti"/>
+        <a:font script="Viet" typeface="Times New Roman"/>
+        <a:font script="Uigh" typeface="Microsoft Uighur"/>
+        <a:font script="Geor" typeface="Sylfaen"/>
+        <a:font script="Armn" typeface="Arial"/>
+        <a:font script="Bugi" typeface="Leelawadee UI"/>
+        <a:font script="Bopo" typeface="Microsoft JhengHei"/>
+        <a:font script="Java" typeface="Javanese Text"/>
+        <a:font script="Lisu" typeface="Segoe UI"/>
+        <a:font script="Mymr" typeface="Myanmar Text"/>
+        <a:font script="Nkoo" typeface="Ebrima"/>
+        <a:font script="Olck" typeface="Nirmala UI"/>
+        <a:font script="Osma" typeface="Ebrima"/>
+        <a:font script="Phag" typeface="Phagspa"/>
+        <a:font script="Syrn" typeface="Estrangelo Edessa"/>
+        <a:font script="Syrj" typeface="Estrangelo Edessa"/>
+        <a:font script="Syre" typeface="Estrangelo Edessa"/>
+        <a:font script="Sora" typeface="Nirmala UI"/>
+        <a:font script="Tale" typeface="Microsoft Tai Le"/>
+        <a:font script="Talu" typeface="Microsoft New Tai Lue"/>
+        <a:font script="Tfng" typeface="Ebrima"/>
+      </a:majorFont>
+      <a:minorFont>
+        <a:latin typeface="Aptos" panose="02110004020202020204"/>
+        <a:ea typeface=""/>
+        <a:cs typeface=""/>
+        <a:font script="Jpan" typeface="游ゴシック"/>
+        <a:font script="Hang" typeface="맑은 고딕"/>
+        <a:font script="Hans" typeface="等线"/>
+        <a:font script="Hant" typeface="新細明體"/>
+        <a:font script="Arab" typeface="Arial"/>
+        <a:font script="Hebr" typeface="Arial"/>
+        <a:font script="Thai" typeface="Cordia New"/>
+        <a:font script="Ethi" typeface="Nyala"/>
+        <a:font script="Beng" typeface="Vrinda"/>
+        <a:font script="Gujr" typeface="Shruti"/>
+        <a:font script="Khmr" typeface="DaunPenh"/>
+        <a:font script="Knda" typeface="Tunga"/>
+        <a:font script="Guru" typeface="Raavi"/>
+        <a:font script="Cans" typeface="Euphemia"/>
+        <a:font script="Cher" typeface="Plantagenet Cherokee"/>
+        <a:font script="Yiii" typeface="Microsoft Yi Baiti"/>
+        <a:font script="Tibt" typeface="Microsoft Himalaya"/>
+        <a:font script="Thaa" typeface="MV Boli"/>
+        <a:font script="Deva" typeface="Mangal"/>
+        <a:font script="Telu" typeface="Gautami"/>
+        <a:font script="Taml" typeface="Latha"/>
+        <a:font script="Syrc" typeface="Estrangelo Edessa"/>
+        <a:font script="Orya" typeface="Kalinga"/>
+        <a:font script="Mlym" typeface="Kartika"/>
+        <a:font script="Laoo" typeface="DokChampa"/>
+        <a:font script="Sinh" typeface="Iskoola Pota"/>
+        <a:font script="Mong" typeface="Mongolian Baiti"/>
+        <a:font script="Viet" typeface="Arial"/>
+        <a:font script="Uigh" typeface="Microsoft Uighur"/>
+        <a:font script="Geor" typeface="Sylfaen"/>
+        <a:font script="Armn" typeface="Arial"/>
+        <a:font script="Bugi" typeface="Leelawadee UI"/>
+        <a:font script="Bopo" typeface="Microsoft JhengHei"/>
+        <a:font script="Java" typeface="Javanese Text"/>
+        <a:font script="Lisu" typeface="Segoe UI"/>
+        <a:font script="Mymr" typeface="Myanmar Text"/>
+        <a:font script="Nkoo" typeface="Ebrima"/>
+        <a:font script="Olck" typeface="Nirmala UI"/>
+        <a:font script="Osma" typeface="Ebrima"/>
+        <a:font script="Phag" typeface="Phagspa"/>
+        <a:font script="Syrn" typeface="Estrangelo Edessa"/>
+        <a:font script="Syrj" typeface="Estrangelo Edessa"/>
+        <a:font script="Syre" typeface="Estrangelo Edessa"/>
+        <a:font script="Sora" typeface="Nirmala UI"/>
+        <a:font script="Tale" typeface="Microsoft Tai Le"/>
+        <a:font script="Talu" typeface="Microsoft New Tai Lue"/>
+        <a:font script="Tfng" typeface="Ebrima"/>
+      </a:minorFont>
+    </a:fontScheme>
+    <a:fmtScheme name="Office">
+      <a:fillStyleLst>
+        <a:solidFill>
+          <a:schemeClr val="phClr"/>
+        </a:solidFill>
+        <a:gradFill rotWithShape="1">
+          <a:gsLst>
+            <a:gs pos="0">
+              <a:schemeClr val="phClr">
+                <a:lumMod val="110000"/>
+                <a:satMod val="105000"/>
+                <a:tint val="67000"/>
+              </a:schemeClr>
+            </a:gs>
+            <a:gs pos="50000">
+              <a:schemeClr val="phClr">
+                <a:lumMod val="105000"/>
+                <a:satMod val="103000"/>
+                <a:tint val="73000"/>
+              </a:schemeClr>
+            </a:gs>
+            <a:gs pos="100000">
+              <a:schemeClr val="phClr">
+                <a:lumMod val="105000"/>
+                <a:satMod val="109000"/>
+                <a:tint val="81000"/>
+              </a:schemeClr>
+            </a:gs>
+          </a:gsLst>
+          <a:lin ang="5400000" scaled="0"/>
+        </a:gradFill>
+        <a:gradFill rotWithShape="1">
+          <a:gsLst>
+            <a:gs pos="0">
+              <a:schemeClr val="phClr">
+                <a:satMod val="103000"/>
+                <a:lumMod val="102000"/>
+                <a:tint val="94000"/>
+              </a:schemeClr>
+            </a:gs>
+            <a:gs pos="50000">
+              <a:schemeClr val="phClr">
+                <a:satMod val="110000"/>
+                <a:lumMod val="100000"/>
+                <a:shade val="100000"/>
+              </a:schemeClr>
+            </a:gs>
+            <a:gs pos="100000">
+              <a:schemeClr val="phClr">
+                <a:lumMod val="99000"/>
+                <a:satMod val="120000"/>
+                <a:shade val="78000"/>
+              </a:schemeClr>
+            </a:gs>
+          </a:gsLst>
+          <a:lin ang="5400000" scaled="0"/>
+        </a:gradFill>
+      </a:fillStyleLst>
+      <a:lnStyleLst>
+        <a:ln w="12700" cap="flat" cmpd="sng" algn="ctr">
+          <a:solidFill>
+            <a:schemeClr val="phClr"/>
+          </a:solidFill>
+          <a:prstDash val="solid"/>
+          <a:miter lim="800000"/>
+        </a:ln>
+        <a:ln w="19050" cap="flat" cmpd="sng" algn="ctr">
+          <a:solidFill>
+            <a:schemeClr val="phClr"/>
+          </a:solidFill>
+          <a:prstDash val="solid"/>
+          <a:miter lim="800000"/>
+        </a:ln>
+        <a:ln w="25400" cap="flat" cmpd="sng" algn="ctr">
+          <a:solidFill>
+            <a:schemeClr val="phClr"/>
+          </a:solidFill>
+          <a:prstDash val="solid"/>
+          <a:miter lim="800000"/>
+        </a:ln>
+      </a:lnStyleLst>
+      <a:effectStyleLst>
+        <a:effectStyle>
+          <a:effectLst/>
+        </a:effectStyle>
+        <a:effectStyle>
+          <a:effectLst/>
+        </a:effectStyle>
+        <a:effectStyle>
+          <a:effectLst>
+            <a:outerShdw blurRad="57150" dist="19050" dir="5400000" algn="ctr" rotWithShape="0">
+              <a:srgbClr val="000000">
+                <a:alpha val="63000"/>
+              </a:srgbClr>
+            </a:outerShdw>
+          </a:effectLst>
+        </a:effectStyle>
+      </a:effectStyleLst>
+      <a:bgFillStyleLst>
+        <a:solidFill>
+          <a:schemeClr val="phClr"/>
+        </a:solidFill>
+        <a:solidFill>
+          <a:schemeClr val="phClr">
+            <a:tint val="95000"/>
+            <a:satMod val="170000"/>
+          </a:schemeClr>
+        </a:solidFill>
+        <a:gradFill rotWithShape="1">
+          <a:gsLst>
+            <a:gs pos="0">
+              <a:schemeClr val="phClr">
+                <a:tint val="93000"/>
+                <a:satMod val="150000"/>
+                <a:shade val="98000"/>
+                <a:lumMod val="102000"/>
+              </a:schemeClr>
+            </a:gs>
+            <a:gs pos="50000">
+              <a:schemeClr val="phClr">
+                <a:tint val="98000"/>
+                <a:satMod val="130000"/>
+                <a:shade val="90000"/>
+                <a:lumMod val="103000"/>
+              </a:schemeClr>
+            </a:gs>
+            <a:gs pos="100000">
+              <a:schemeClr val="phClr">
+                <a:shade val="63000"/>
+                <a:satMod val="120000"/>
+              </a:schemeClr>
+            </a:gs>
+          </a:gsLst>
+          <a:lin ang="5400000" scaled="0"/>
+        </a:gradFill>
+      </a:bgFillStyleLst>
+    </a:fmtScheme>
+  </a:themeElements>
+  <a:objectDefaults>
+    <a:lnDef>
+      <a:spPr/>
+      <a:bodyPr/>
+      <a:lstStyle/>
+      <a:style>
+        <a:lnRef idx="2">
+          <a:schemeClr val="accent1"/>
+        </a:lnRef>
+        <a:fillRef idx="0">
+          <a:schemeClr val="accent1"/>
+        </a:fillRef>
+        <a:effectRef idx="1">
+          <a:schemeClr val="accent1"/>
+        </a:effectRef>
+        <a:fontRef idx="minor">
+          <a:schemeClr val="tx1"/>
+        </a:fontRef>
+      </a:style>
+    </a:lnDef>
+  </a:objectDefaults>
+  <a:extraClrSchemeLst/>
+  <a:extLst>
+    <a:ext uri="{05A4C25C-085E-4340-85A3-A5531E510DB2}">
+      <thm15:themeFamily xmlns:thm15="http://schemas.microsoft.com/office/thememl/2012/main" name="Office Theme" id="{2E142A2C-CD16-42D6-873A-C26D2A0506FA}" vid="{1BDDFF52-6CD6-40A5-AB3C-68EB2F1E4D0A}"/>
+    </a:ext>
+  </a:extLst>
+</a:theme>
 </file>